--- a/Presentacion_Sistema_Administrativo_ADMOND.pptx
+++ b/Presentacion_Sistema_Administrativo_ADMOND.pptx
@@ -5,21 +5,21 @@
     <p:sldMasterId id="2147483648" r:id="rId1"/>
   </p:sldMasterIdLst>
   <p:sldIdLst>
-    <p:sldId id="256" r:id="rId7"/>
-    <p:sldId id="257" r:id="rId8"/>
-    <p:sldId id="258" r:id="rId9"/>
-    <p:sldId id="259" r:id="rId10"/>
-    <p:sldId id="260" r:id="rId11"/>
-    <p:sldId id="261" r:id="rId12"/>
-    <p:sldId id="262" r:id="rId13"/>
-    <p:sldId id="263" r:id="rId14"/>
-    <p:sldId id="264" r:id="rId15"/>
-    <p:sldId id="265" r:id="rId16"/>
-    <p:sldId id="266" r:id="rId17"/>
-    <p:sldId id="267" r:id="rId18"/>
-    <p:sldId id="268" r:id="rId19"/>
+    <p:sldId id="256" r:id="rId2"/>
+    <p:sldId id="257" r:id="rId3"/>
+    <p:sldId id="258" r:id="rId4"/>
+    <p:sldId id="259" r:id="rId5"/>
+    <p:sldId id="260" r:id="rId6"/>
+    <p:sldId id="261" r:id="rId7"/>
+    <p:sldId id="262" r:id="rId8"/>
+    <p:sldId id="263" r:id="rId9"/>
+    <p:sldId id="264" r:id="rId10"/>
+    <p:sldId id="265" r:id="rId11"/>
+    <p:sldId id="266" r:id="rId12"/>
+    <p:sldId id="267" r:id="rId13"/>
+    <p:sldId id="268" r:id="rId14"/>
   </p:sldIdLst>
-  <p:sldSz cx="12191695" cy="6858000" type="screen4x3"/>
+  <p:sldSz cx="12192000" cy="6858000"/>
   <p:notesSz cx="6858000" cy="9144000"/>
   <p:defaultTextStyle>
     <a:defPPr>
@@ -116,7 +116,52 @@
       </a:defRPr>
     </a:lvl9pPr>
   </p:defaultTextStyle>
+  <p:extLst>
+    <p:ext uri="{EFAFB233-063F-42B5-8137-9DF3F51BA10A}">
+      <p15:sldGuideLst xmlns:p15="http://schemas.microsoft.com/office/powerpoint/2012/main">
+        <p15:guide id="1" orient="horz" pos="2160">
+          <p15:clr>
+            <a:srgbClr val="A4A3A4"/>
+          </p15:clr>
+        </p15:guide>
+        <p15:guide id="2" pos="2880">
+          <p15:clr>
+            <a:srgbClr val="A4A3A4"/>
+          </p15:clr>
+        </p15:guide>
+      </p15:sldGuideLst>
+    </p:ext>
+  </p:extLst>
 </p:presentation>
+</file>
+
+<file path=ppt/changesInfos/changesInfo1.xml><?xml version="1.0" encoding="utf-8"?>
+<pc:chgInfo xmlns:a="http://schemas.openxmlformats.org/drawingml/2006/main" xmlns:r="http://schemas.openxmlformats.org/officeDocument/2006/relationships" xmlns:ac="http://schemas.microsoft.com/office/drawing/2013/main/command" xmlns:pc="http://schemas.microsoft.com/office/powerpoint/2013/main/command">
+  <pc:docChgLst>
+    <pc:chgData name="Maria de Jesus Perez Arana" userId="9e4ea40cfe1bdf45" providerId="LiveId" clId="{577BE375-2B28-4889-BB3C-B10C3805386F}"/>
+    <pc:docChg chg="modSld">
+      <pc:chgData name="Maria de Jesus Perez Arana" userId="9e4ea40cfe1bdf45" providerId="LiveId" clId="{577BE375-2B28-4889-BB3C-B10C3805386F}" dt="2026-10-05T15:54:07.011" v="15" actId="20577"/>
+      <pc:docMkLst>
+        <pc:docMk/>
+      </pc:docMkLst>
+      <pc:sldChg chg="modSp mod">
+        <pc:chgData name="Maria de Jesus Perez Arana" userId="9e4ea40cfe1bdf45" providerId="LiveId" clId="{577BE375-2B28-4889-BB3C-B10C3805386F}" dt="2026-10-05T15:54:07.011" v="15" actId="20577"/>
+        <pc:sldMkLst>
+          <pc:docMk/>
+          <pc:sldMk cId="0" sldId="257"/>
+        </pc:sldMkLst>
+        <pc:spChg chg="mod">
+          <ac:chgData name="Maria de Jesus Perez Arana" userId="9e4ea40cfe1bdf45" providerId="LiveId" clId="{577BE375-2B28-4889-BB3C-B10C3805386F}" dt="2026-10-05T15:54:07.011" v="15" actId="20577"/>
+          <ac:spMkLst>
+            <pc:docMk/>
+            <pc:sldMk cId="0" sldId="257"/>
+            <ac:spMk id="9" creationId="{00000000-0000-0000-0000-000000000000}"/>
+          </ac:spMkLst>
+        </pc:spChg>
+      </pc:sldChg>
+    </pc:docChg>
+  </pc:docChgLst>
+</pc:chgInfo>
 </file>
 
 <file path=ppt/slideLayouts/slideLayout1.xml><?xml version="1.0" encoding="utf-8"?>
@@ -157,10 +202,9 @@
           <a:lstStyle/>
           <a:p>
             <a:r>
-              <a:rPr lang="en-US" smtClean="0"/>
+              <a:rPr lang="en-US"/>
               <a:t>Click to edit Master title style</a:t>
             </a:r>
-            <a:endParaRPr lang="en-US"/>
           </a:p>
         </p:txBody>
       </p:sp>
@@ -276,10 +320,9 @@
           </a:lstStyle>
           <a:p>
             <a:r>
-              <a:rPr lang="en-US" smtClean="0"/>
+              <a:rPr lang="en-US"/>
               <a:t>Click to edit Master subtitle style</a:t>
             </a:r>
-            <a:endParaRPr lang="en-US"/>
           </a:p>
         </p:txBody>
       </p:sp>
@@ -300,7 +343,7 @@
           <a:p>
             <a:fld id="{5BCAD085-E8A6-8845-BD4E-CB4CCA059FC4}" type="datetimeFigureOut">
               <a:rPr lang="en-US" smtClean="0"/>
-              <a:t>1/27/13</a:t>
+              <a:t>10/5/2026</a:t>
             </a:fld>
             <a:endParaRPr lang="en-US"/>
           </a:p>
@@ -342,7 +385,7 @@
           <a:p>
             <a:fld id="{C1FF6DA9-008F-8B48-92A6-B652298478BF}" type="slidenum">
               <a:rPr lang="en-US" smtClean="0"/>
-              <a:t>‹#›</a:t>
+              <a:t>‹Nº›</a:t>
             </a:fld>
             <a:endParaRPr lang="en-US"/>
           </a:p>
@@ -394,10 +437,9 @@
           <a:lstStyle/>
           <a:p>
             <a:r>
-              <a:rPr lang="en-US" smtClean="0"/>
+              <a:rPr lang="en-US"/>
               <a:t>Click to edit Master title style</a:t>
             </a:r>
-            <a:endParaRPr lang="en-US"/>
           </a:p>
         </p:txBody>
       </p:sp>
@@ -418,38 +460,37 @@
           <a:p>
             <a:pPr lvl="0"/>
             <a:r>
-              <a:rPr lang="en-US" smtClean="0"/>
+              <a:rPr lang="en-US"/>
               <a:t>Click to edit Master text styles</a:t>
             </a:r>
           </a:p>
           <a:p>
             <a:pPr lvl="1"/>
             <a:r>
-              <a:rPr lang="en-US" smtClean="0"/>
+              <a:rPr lang="en-US"/>
               <a:t>Second level</a:t>
             </a:r>
           </a:p>
           <a:p>
             <a:pPr lvl="2"/>
             <a:r>
-              <a:rPr lang="en-US" smtClean="0"/>
+              <a:rPr lang="en-US"/>
               <a:t>Third level</a:t>
             </a:r>
           </a:p>
           <a:p>
             <a:pPr lvl="3"/>
             <a:r>
-              <a:rPr lang="en-US" smtClean="0"/>
+              <a:rPr lang="en-US"/>
               <a:t>Fourth level</a:t>
             </a:r>
           </a:p>
           <a:p>
             <a:pPr lvl="4"/>
             <a:r>
-              <a:rPr lang="en-US" smtClean="0"/>
+              <a:rPr lang="en-US"/>
               <a:t>Fifth level</a:t>
             </a:r>
-            <a:endParaRPr lang="en-US"/>
           </a:p>
         </p:txBody>
       </p:sp>
@@ -470,7 +511,7 @@
           <a:p>
             <a:fld id="{5BCAD085-E8A6-8845-BD4E-CB4CCA059FC4}" type="datetimeFigureOut">
               <a:rPr lang="en-US" smtClean="0"/>
-              <a:t>1/27/13</a:t>
+              <a:t>10/5/2026</a:t>
             </a:fld>
             <a:endParaRPr lang="en-US"/>
           </a:p>
@@ -512,7 +553,7 @@
           <a:p>
             <a:fld id="{C1FF6DA9-008F-8B48-92A6-B652298478BF}" type="slidenum">
               <a:rPr lang="en-US" smtClean="0"/>
-              <a:t>‹#›</a:t>
+              <a:t>‹Nº›</a:t>
             </a:fld>
             <a:endParaRPr lang="en-US"/>
           </a:p>
@@ -569,10 +610,9 @@
           <a:lstStyle/>
           <a:p>
             <a:r>
-              <a:rPr lang="en-US" smtClean="0"/>
+              <a:rPr lang="en-US"/>
               <a:t>Click to edit Master title style</a:t>
             </a:r>
-            <a:endParaRPr lang="en-US"/>
           </a:p>
         </p:txBody>
       </p:sp>
@@ -598,38 +638,37 @@
           <a:p>
             <a:pPr lvl="0"/>
             <a:r>
-              <a:rPr lang="en-US" smtClean="0"/>
+              <a:rPr lang="en-US"/>
               <a:t>Click to edit Master text styles</a:t>
             </a:r>
           </a:p>
           <a:p>
             <a:pPr lvl="1"/>
             <a:r>
-              <a:rPr lang="en-US" smtClean="0"/>
+              <a:rPr lang="en-US"/>
               <a:t>Second level</a:t>
             </a:r>
           </a:p>
           <a:p>
             <a:pPr lvl="2"/>
             <a:r>
-              <a:rPr lang="en-US" smtClean="0"/>
+              <a:rPr lang="en-US"/>
               <a:t>Third level</a:t>
             </a:r>
           </a:p>
           <a:p>
             <a:pPr lvl="3"/>
             <a:r>
-              <a:rPr lang="en-US" smtClean="0"/>
+              <a:rPr lang="en-US"/>
               <a:t>Fourth level</a:t>
             </a:r>
           </a:p>
           <a:p>
             <a:pPr lvl="4"/>
             <a:r>
-              <a:rPr lang="en-US" smtClean="0"/>
+              <a:rPr lang="en-US"/>
               <a:t>Fifth level</a:t>
             </a:r>
-            <a:endParaRPr lang="en-US"/>
           </a:p>
         </p:txBody>
       </p:sp>
@@ -650,7 +689,7 @@
           <a:p>
             <a:fld id="{5BCAD085-E8A6-8845-BD4E-CB4CCA059FC4}" type="datetimeFigureOut">
               <a:rPr lang="en-US" smtClean="0"/>
-              <a:t>1/27/13</a:t>
+              <a:t>10/5/2026</a:t>
             </a:fld>
             <a:endParaRPr lang="en-US"/>
           </a:p>
@@ -692,7 +731,7 @@
           <a:p>
             <a:fld id="{C1FF6DA9-008F-8B48-92A6-B652298478BF}" type="slidenum">
               <a:rPr lang="en-US" smtClean="0"/>
-              <a:t>‹#›</a:t>
+              <a:t>‹Nº›</a:t>
             </a:fld>
             <a:endParaRPr lang="en-US"/>
           </a:p>
@@ -744,10 +783,9 @@
           <a:lstStyle/>
           <a:p>
             <a:r>
-              <a:rPr lang="en-US" smtClean="0"/>
+              <a:rPr lang="en-US"/>
               <a:t>Click to edit Master title style</a:t>
             </a:r>
-            <a:endParaRPr lang="en-US"/>
           </a:p>
         </p:txBody>
       </p:sp>
@@ -768,38 +806,37 @@
           <a:p>
             <a:pPr lvl="0"/>
             <a:r>
-              <a:rPr lang="en-US" smtClean="0"/>
+              <a:rPr lang="en-US"/>
               <a:t>Click to edit Master text styles</a:t>
             </a:r>
           </a:p>
           <a:p>
             <a:pPr lvl="1"/>
             <a:r>
-              <a:rPr lang="en-US" smtClean="0"/>
+              <a:rPr lang="en-US"/>
               <a:t>Second level</a:t>
             </a:r>
           </a:p>
           <a:p>
             <a:pPr lvl="2"/>
             <a:r>
-              <a:rPr lang="en-US" smtClean="0"/>
+              <a:rPr lang="en-US"/>
               <a:t>Third level</a:t>
             </a:r>
           </a:p>
           <a:p>
             <a:pPr lvl="3"/>
             <a:r>
-              <a:rPr lang="en-US" smtClean="0"/>
+              <a:rPr lang="en-US"/>
               <a:t>Fourth level</a:t>
             </a:r>
           </a:p>
           <a:p>
             <a:pPr lvl="4"/>
             <a:r>
-              <a:rPr lang="en-US" smtClean="0"/>
+              <a:rPr lang="en-US"/>
               <a:t>Fifth level</a:t>
             </a:r>
-            <a:endParaRPr lang="en-US"/>
           </a:p>
         </p:txBody>
       </p:sp>
@@ -820,7 +857,7 @@
           <a:p>
             <a:fld id="{5BCAD085-E8A6-8845-BD4E-CB4CCA059FC4}" type="datetimeFigureOut">
               <a:rPr lang="en-US" smtClean="0"/>
-              <a:t>1/27/13</a:t>
+              <a:t>10/5/2026</a:t>
             </a:fld>
             <a:endParaRPr lang="en-US"/>
           </a:p>
@@ -862,7 +899,7 @@
           <a:p>
             <a:fld id="{C1FF6DA9-008F-8B48-92A6-B652298478BF}" type="slidenum">
               <a:rPr lang="en-US" smtClean="0"/>
-              <a:t>‹#›</a:t>
+              <a:t>‹Nº›</a:t>
             </a:fld>
             <a:endParaRPr lang="en-US"/>
           </a:p>
@@ -923,10 +960,9 @@
           </a:lstStyle>
           <a:p>
             <a:r>
-              <a:rPr lang="en-US" smtClean="0"/>
+              <a:rPr lang="en-US"/>
               <a:t>Click to edit Master title style</a:t>
             </a:r>
-            <a:endParaRPr lang="en-US"/>
           </a:p>
         </p:txBody>
       </p:sp>
@@ -1043,7 +1079,7 @@
           <a:p>
             <a:pPr lvl="0"/>
             <a:r>
-              <a:rPr lang="en-US" smtClean="0"/>
+              <a:rPr lang="en-US"/>
               <a:t>Click to edit Master text styles</a:t>
             </a:r>
           </a:p>
@@ -1066,7 +1102,7 @@
           <a:p>
             <a:fld id="{5BCAD085-E8A6-8845-BD4E-CB4CCA059FC4}" type="datetimeFigureOut">
               <a:rPr lang="en-US" smtClean="0"/>
-              <a:t>1/27/13</a:t>
+              <a:t>10/5/2026</a:t>
             </a:fld>
             <a:endParaRPr lang="en-US"/>
           </a:p>
@@ -1108,7 +1144,7 @@
           <a:p>
             <a:fld id="{C1FF6DA9-008F-8B48-92A6-B652298478BF}" type="slidenum">
               <a:rPr lang="en-US" smtClean="0"/>
-              <a:t>‹#›</a:t>
+              <a:t>‹Nº›</a:t>
             </a:fld>
             <a:endParaRPr lang="en-US"/>
           </a:p>
@@ -1160,10 +1196,9 @@
           <a:lstStyle/>
           <a:p>
             <a:r>
-              <a:rPr lang="en-US" smtClean="0"/>
+              <a:rPr lang="en-US"/>
               <a:t>Click to edit Master title style</a:t>
             </a:r>
-            <a:endParaRPr lang="en-US"/>
           </a:p>
         </p:txBody>
       </p:sp>
@@ -1217,38 +1252,37 @@
           <a:p>
             <a:pPr lvl="0"/>
             <a:r>
-              <a:rPr lang="en-US" smtClean="0"/>
+              <a:rPr lang="en-US"/>
               <a:t>Click to edit Master text styles</a:t>
             </a:r>
           </a:p>
           <a:p>
             <a:pPr lvl="1"/>
             <a:r>
-              <a:rPr lang="en-US" smtClean="0"/>
+              <a:rPr lang="en-US"/>
               <a:t>Second level</a:t>
             </a:r>
           </a:p>
           <a:p>
             <a:pPr lvl="2"/>
             <a:r>
-              <a:rPr lang="en-US" smtClean="0"/>
+              <a:rPr lang="en-US"/>
               <a:t>Third level</a:t>
             </a:r>
           </a:p>
           <a:p>
             <a:pPr lvl="3"/>
             <a:r>
-              <a:rPr lang="en-US" smtClean="0"/>
+              <a:rPr lang="en-US"/>
               <a:t>Fourth level</a:t>
             </a:r>
           </a:p>
           <a:p>
             <a:pPr lvl="4"/>
             <a:r>
-              <a:rPr lang="en-US" smtClean="0"/>
+              <a:rPr lang="en-US"/>
               <a:t>Fifth level</a:t>
             </a:r>
-            <a:endParaRPr lang="en-US"/>
           </a:p>
         </p:txBody>
       </p:sp>
@@ -1302,38 +1336,37 @@
           <a:p>
             <a:pPr lvl="0"/>
             <a:r>
-              <a:rPr lang="en-US" smtClean="0"/>
+              <a:rPr lang="en-US"/>
               <a:t>Click to edit Master text styles</a:t>
             </a:r>
           </a:p>
           <a:p>
             <a:pPr lvl="1"/>
             <a:r>
-              <a:rPr lang="en-US" smtClean="0"/>
+              <a:rPr lang="en-US"/>
               <a:t>Second level</a:t>
             </a:r>
           </a:p>
           <a:p>
             <a:pPr lvl="2"/>
             <a:r>
-              <a:rPr lang="en-US" smtClean="0"/>
+              <a:rPr lang="en-US"/>
               <a:t>Third level</a:t>
             </a:r>
           </a:p>
           <a:p>
             <a:pPr lvl="3"/>
             <a:r>
-              <a:rPr lang="en-US" smtClean="0"/>
+              <a:rPr lang="en-US"/>
               <a:t>Fourth level</a:t>
             </a:r>
           </a:p>
           <a:p>
             <a:pPr lvl="4"/>
             <a:r>
-              <a:rPr lang="en-US" smtClean="0"/>
+              <a:rPr lang="en-US"/>
               <a:t>Fifth level</a:t>
             </a:r>
-            <a:endParaRPr lang="en-US"/>
           </a:p>
         </p:txBody>
       </p:sp>
@@ -1354,7 +1387,7 @@
           <a:p>
             <a:fld id="{5BCAD085-E8A6-8845-BD4E-CB4CCA059FC4}" type="datetimeFigureOut">
               <a:rPr lang="en-US" smtClean="0"/>
-              <a:t>1/27/13</a:t>
+              <a:t>10/5/2026</a:t>
             </a:fld>
             <a:endParaRPr lang="en-US"/>
           </a:p>
@@ -1396,7 +1429,7 @@
           <a:p>
             <a:fld id="{C1FF6DA9-008F-8B48-92A6-B652298478BF}" type="slidenum">
               <a:rPr lang="en-US" smtClean="0"/>
-              <a:t>‹#›</a:t>
+              <a:t>‹Nº›</a:t>
             </a:fld>
             <a:endParaRPr lang="en-US"/>
           </a:p>
@@ -1452,10 +1485,9 @@
           </a:lstStyle>
           <a:p>
             <a:r>
-              <a:rPr lang="en-US" smtClean="0"/>
+              <a:rPr lang="en-US"/>
               <a:t>Click to edit Master title style</a:t>
             </a:r>
-            <a:endParaRPr lang="en-US"/>
           </a:p>
         </p:txBody>
       </p:sp>
@@ -1518,7 +1550,7 @@
           <a:p>
             <a:pPr lvl="0"/>
             <a:r>
-              <a:rPr lang="en-US" smtClean="0"/>
+              <a:rPr lang="en-US"/>
               <a:t>Click to edit Master text styles</a:t>
             </a:r>
           </a:p>
@@ -1574,38 +1606,37 @@
           <a:p>
             <a:pPr lvl="0"/>
             <a:r>
-              <a:rPr lang="en-US" smtClean="0"/>
+              <a:rPr lang="en-US"/>
               <a:t>Click to edit Master text styles</a:t>
             </a:r>
           </a:p>
           <a:p>
             <a:pPr lvl="1"/>
             <a:r>
-              <a:rPr lang="en-US" smtClean="0"/>
+              <a:rPr lang="en-US"/>
               <a:t>Second level</a:t>
             </a:r>
           </a:p>
           <a:p>
             <a:pPr lvl="2"/>
             <a:r>
-              <a:rPr lang="en-US" smtClean="0"/>
+              <a:rPr lang="en-US"/>
               <a:t>Third level</a:t>
             </a:r>
           </a:p>
           <a:p>
             <a:pPr lvl="3"/>
             <a:r>
-              <a:rPr lang="en-US" smtClean="0"/>
+              <a:rPr lang="en-US"/>
               <a:t>Fourth level</a:t>
             </a:r>
           </a:p>
           <a:p>
             <a:pPr lvl="4"/>
             <a:r>
-              <a:rPr lang="en-US" smtClean="0"/>
+              <a:rPr lang="en-US"/>
               <a:t>Fifth level</a:t>
             </a:r>
-            <a:endParaRPr lang="en-US"/>
           </a:p>
         </p:txBody>
       </p:sp>
@@ -1668,7 +1699,7 @@
           <a:p>
             <a:pPr lvl="0"/>
             <a:r>
-              <a:rPr lang="en-US" smtClean="0"/>
+              <a:rPr lang="en-US"/>
               <a:t>Click to edit Master text styles</a:t>
             </a:r>
           </a:p>
@@ -1724,38 +1755,37 @@
           <a:p>
             <a:pPr lvl="0"/>
             <a:r>
-              <a:rPr lang="en-US" smtClean="0"/>
+              <a:rPr lang="en-US"/>
               <a:t>Click to edit Master text styles</a:t>
             </a:r>
           </a:p>
           <a:p>
             <a:pPr lvl="1"/>
             <a:r>
-              <a:rPr lang="en-US" smtClean="0"/>
+              <a:rPr lang="en-US"/>
               <a:t>Second level</a:t>
             </a:r>
           </a:p>
           <a:p>
             <a:pPr lvl="2"/>
             <a:r>
-              <a:rPr lang="en-US" smtClean="0"/>
+              <a:rPr lang="en-US"/>
               <a:t>Third level</a:t>
             </a:r>
           </a:p>
           <a:p>
             <a:pPr lvl="3"/>
             <a:r>
-              <a:rPr lang="en-US" smtClean="0"/>
+              <a:rPr lang="en-US"/>
               <a:t>Fourth level</a:t>
             </a:r>
           </a:p>
           <a:p>
             <a:pPr lvl="4"/>
             <a:r>
-              <a:rPr lang="en-US" smtClean="0"/>
+              <a:rPr lang="en-US"/>
               <a:t>Fifth level</a:t>
             </a:r>
-            <a:endParaRPr lang="en-US"/>
           </a:p>
         </p:txBody>
       </p:sp>
@@ -1776,7 +1806,7 @@
           <a:p>
             <a:fld id="{5BCAD085-E8A6-8845-BD4E-CB4CCA059FC4}" type="datetimeFigureOut">
               <a:rPr lang="en-US" smtClean="0"/>
-              <a:t>1/27/13</a:t>
+              <a:t>10/5/2026</a:t>
             </a:fld>
             <a:endParaRPr lang="en-US"/>
           </a:p>
@@ -1818,7 +1848,7 @@
           <a:p>
             <a:fld id="{C1FF6DA9-008F-8B48-92A6-B652298478BF}" type="slidenum">
               <a:rPr lang="en-US" smtClean="0"/>
-              <a:t>‹#›</a:t>
+              <a:t>‹Nº›</a:t>
             </a:fld>
             <a:endParaRPr lang="en-US"/>
           </a:p>
@@ -1870,10 +1900,9 @@
           <a:lstStyle/>
           <a:p>
             <a:r>
-              <a:rPr lang="en-US" smtClean="0"/>
+              <a:rPr lang="en-US"/>
               <a:t>Click to edit Master title style</a:t>
             </a:r>
-            <a:endParaRPr lang="en-US"/>
           </a:p>
         </p:txBody>
       </p:sp>
@@ -1894,7 +1923,7 @@
           <a:p>
             <a:fld id="{5BCAD085-E8A6-8845-BD4E-CB4CCA059FC4}" type="datetimeFigureOut">
               <a:rPr lang="en-US" smtClean="0"/>
-              <a:t>1/27/13</a:t>
+              <a:t>10/5/2026</a:t>
             </a:fld>
             <a:endParaRPr lang="en-US"/>
           </a:p>
@@ -1936,7 +1965,7 @@
           <a:p>
             <a:fld id="{C1FF6DA9-008F-8B48-92A6-B652298478BF}" type="slidenum">
               <a:rPr lang="en-US" smtClean="0"/>
-              <a:t>‹#›</a:t>
+              <a:t>‹Nº›</a:t>
             </a:fld>
             <a:endParaRPr lang="en-US"/>
           </a:p>
@@ -1989,7 +2018,7 @@
           <a:p>
             <a:fld id="{5BCAD085-E8A6-8845-BD4E-CB4CCA059FC4}" type="datetimeFigureOut">
               <a:rPr lang="en-US" smtClean="0"/>
-              <a:t>1/27/13</a:t>
+              <a:t>10/5/2026</a:t>
             </a:fld>
             <a:endParaRPr lang="en-US"/>
           </a:p>
@@ -2031,7 +2060,7 @@
           <a:p>
             <a:fld id="{C1FF6DA9-008F-8B48-92A6-B652298478BF}" type="slidenum">
               <a:rPr lang="en-US" smtClean="0"/>
-              <a:t>‹#›</a:t>
+              <a:t>‹Nº›</a:t>
             </a:fld>
             <a:endParaRPr lang="en-US"/>
           </a:p>
@@ -2092,10 +2121,9 @@
           </a:lstStyle>
           <a:p>
             <a:r>
-              <a:rPr lang="en-US" smtClean="0"/>
+              <a:rPr lang="en-US"/>
               <a:t>Click to edit Master title style</a:t>
             </a:r>
-            <a:endParaRPr lang="en-US"/>
           </a:p>
         </p:txBody>
       </p:sp>
@@ -2149,38 +2177,37 @@
           <a:p>
             <a:pPr lvl="0"/>
             <a:r>
-              <a:rPr lang="en-US" smtClean="0"/>
+              <a:rPr lang="en-US"/>
               <a:t>Click to edit Master text styles</a:t>
             </a:r>
           </a:p>
           <a:p>
             <a:pPr lvl="1"/>
             <a:r>
-              <a:rPr lang="en-US" smtClean="0"/>
+              <a:rPr lang="en-US"/>
               <a:t>Second level</a:t>
             </a:r>
           </a:p>
           <a:p>
             <a:pPr lvl="2"/>
             <a:r>
-              <a:rPr lang="en-US" smtClean="0"/>
+              <a:rPr lang="en-US"/>
               <a:t>Third level</a:t>
             </a:r>
           </a:p>
           <a:p>
             <a:pPr lvl="3"/>
             <a:r>
-              <a:rPr lang="en-US" smtClean="0"/>
+              <a:rPr lang="en-US"/>
               <a:t>Fourth level</a:t>
             </a:r>
           </a:p>
           <a:p>
             <a:pPr lvl="4"/>
             <a:r>
-              <a:rPr lang="en-US" smtClean="0"/>
+              <a:rPr lang="en-US"/>
               <a:t>Fifth level</a:t>
             </a:r>
-            <a:endParaRPr lang="en-US"/>
           </a:p>
         </p:txBody>
       </p:sp>
@@ -2243,7 +2270,7 @@
           <a:p>
             <a:pPr lvl="0"/>
             <a:r>
-              <a:rPr lang="en-US" smtClean="0"/>
+              <a:rPr lang="en-US"/>
               <a:t>Click to edit Master text styles</a:t>
             </a:r>
           </a:p>
@@ -2266,7 +2293,7 @@
           <a:p>
             <a:fld id="{5BCAD085-E8A6-8845-BD4E-CB4CCA059FC4}" type="datetimeFigureOut">
               <a:rPr lang="en-US" smtClean="0"/>
-              <a:t>1/27/13</a:t>
+              <a:t>10/5/2026</a:t>
             </a:fld>
             <a:endParaRPr lang="en-US"/>
           </a:p>
@@ -2308,7 +2335,7 @@
           <a:p>
             <a:fld id="{C1FF6DA9-008F-8B48-92A6-B652298478BF}" type="slidenum">
               <a:rPr lang="en-US" smtClean="0"/>
-              <a:t>‹#›</a:t>
+              <a:t>‹Nº›</a:t>
             </a:fld>
             <a:endParaRPr lang="en-US"/>
           </a:p>
@@ -2369,10 +2396,9 @@
           </a:lstStyle>
           <a:p>
             <a:r>
-              <a:rPr lang="en-US" smtClean="0"/>
+              <a:rPr lang="en-US"/>
               <a:t>Click to edit Master title style</a:t>
             </a:r>
-            <a:endParaRPr lang="en-US"/>
           </a:p>
         </p:txBody>
       </p:sp>
@@ -2496,7 +2522,7 @@
           <a:p>
             <a:pPr lvl="0"/>
             <a:r>
-              <a:rPr lang="en-US" smtClean="0"/>
+              <a:rPr lang="en-US"/>
               <a:t>Click to edit Master text styles</a:t>
             </a:r>
           </a:p>
@@ -2519,7 +2545,7 @@
           <a:p>
             <a:fld id="{5BCAD085-E8A6-8845-BD4E-CB4CCA059FC4}" type="datetimeFigureOut">
               <a:rPr lang="en-US" smtClean="0"/>
-              <a:t>1/27/13</a:t>
+              <a:t>10/5/2026</a:t>
             </a:fld>
             <a:endParaRPr lang="en-US"/>
           </a:p>
@@ -2561,7 +2587,7 @@
           <a:p>
             <a:fld id="{C1FF6DA9-008F-8B48-92A6-B652298478BF}" type="slidenum">
               <a:rPr lang="en-US" smtClean="0"/>
-              <a:t>‹#›</a:t>
+              <a:t>‹Nº›</a:t>
             </a:fld>
             <a:endParaRPr lang="en-US"/>
           </a:p>
@@ -2628,10 +2654,9 @@
           <a:lstStyle/>
           <a:p>
             <a:r>
-              <a:rPr lang="en-US" smtClean="0"/>
+              <a:rPr lang="en-US"/>
               <a:t>Click to edit Master title style</a:t>
             </a:r>
-            <a:endParaRPr lang="en-US"/>
           </a:p>
         </p:txBody>
       </p:sp>
@@ -2662,38 +2687,37 @@
           <a:p>
             <a:pPr lvl="0"/>
             <a:r>
-              <a:rPr lang="en-US" smtClean="0"/>
+              <a:rPr lang="en-US"/>
               <a:t>Click to edit Master text styles</a:t>
             </a:r>
           </a:p>
           <a:p>
             <a:pPr lvl="1"/>
             <a:r>
-              <a:rPr lang="en-US" smtClean="0"/>
+              <a:rPr lang="en-US"/>
               <a:t>Second level</a:t>
             </a:r>
           </a:p>
           <a:p>
             <a:pPr lvl="2"/>
             <a:r>
-              <a:rPr lang="en-US" smtClean="0"/>
+              <a:rPr lang="en-US"/>
               <a:t>Third level</a:t>
             </a:r>
           </a:p>
           <a:p>
             <a:pPr lvl="3"/>
             <a:r>
-              <a:rPr lang="en-US" smtClean="0"/>
+              <a:rPr lang="en-US"/>
               <a:t>Fourth level</a:t>
             </a:r>
           </a:p>
           <a:p>
             <a:pPr lvl="4"/>
             <a:r>
-              <a:rPr lang="en-US" smtClean="0"/>
+              <a:rPr lang="en-US"/>
               <a:t>Fifth level</a:t>
             </a:r>
-            <a:endParaRPr lang="en-US"/>
           </a:p>
         </p:txBody>
       </p:sp>
@@ -2732,7 +2756,7 @@
           <a:p>
             <a:fld id="{5BCAD085-E8A6-8845-BD4E-CB4CCA059FC4}" type="datetimeFigureOut">
               <a:rPr lang="en-US" smtClean="0"/>
-              <a:t>1/27/13</a:t>
+              <a:t>10/5/2026</a:t>
             </a:fld>
             <a:endParaRPr lang="en-US"/>
           </a:p>
@@ -2810,7 +2834,7 @@
           <a:p>
             <a:fld id="{C1FF6DA9-008F-8B48-92A6-B652298478BF}" type="slidenum">
               <a:rPr lang="en-US" smtClean="0"/>
-              <a:t>‹#›</a:t>
+              <a:t>‹Nº›</a:t>
             </a:fld>
             <a:endParaRPr lang="en-US"/>
           </a:p>
@@ -3091,7 +3115,7 @@
 </file>
 
 <file path=ppt/slides/slide1.xml><?xml version="1.0" encoding="utf-8"?>
-<p:sld xmlns:a="http://schemas.openxmlformats.org/drawingml/2006/main" xmlns:p="http://schemas.openxmlformats.org/presentationml/2006/main" xmlns:r="http://schemas.openxmlformats.org/officeDocument/2006/relationships">
+<p:sld xmlns:a="http://schemas.openxmlformats.org/drawingml/2006/main" xmlns:r="http://schemas.openxmlformats.org/officeDocument/2006/relationships" xmlns:p="http://schemas.openxmlformats.org/presentationml/2006/main">
   <p:cSld>
     <p:spTree>
       <p:nvGrpSpPr>
@@ -3099,7 +3123,14 @@
         <p:cNvGrpSpPr/>
         <p:nvPr/>
       </p:nvGrpSpPr>
-      <p:grpSpPr/>
+      <p:grpSpPr>
+        <a:xfrm>
+          <a:off x="0" y="0"/>
+          <a:ext cx="0" cy="0"/>
+          <a:chOff x="0" y="0"/>
+          <a:chExt cx="0" cy="0"/>
+        </a:xfrm>
+      </p:grpSpPr>
       <p:sp>
         <p:nvSpPr>
           <p:cNvPr id="2" name="Rectangle 1"/>
@@ -3140,6 +3171,7 @@
           <a:lstStyle/>
           <a:p>
             <a:pPr algn="ctr"/>
+            <a:endParaRPr/>
           </a:p>
         </p:txBody>
       </p:sp>
@@ -3183,6 +3215,7 @@
           <a:lstStyle/>
           <a:p>
             <a:pPr algn="ctr"/>
+            <a:endParaRPr/>
           </a:p>
         </p:txBody>
       </p:sp>
@@ -3227,7 +3260,7 @@
           <a:noFill/>
         </p:spPr>
         <p:txBody>
-          <a:bodyPr wrap="square" lIns="0" rIns="0" tIns="0" bIns="0">
+          <a:bodyPr wrap="square" lIns="0" tIns="0" rIns="0" bIns="0">
             <a:spAutoFit/>
           </a:bodyPr>
           <a:lstStyle/>
@@ -3316,7 +3349,7 @@
           </a:fontRef>
         </p:style>
         <p:txBody>
-          <a:bodyPr rtlCol="0" anchor="ctr" wrap="square"/>
+          <a:bodyPr wrap="square" rtlCol="0" anchor="ctr"/>
           <a:lstStyle/>
           <a:p>
             <a:pPr algn="ctr">
@@ -3384,7 +3417,7 @@
           </a:fontRef>
         </p:style>
         <p:txBody>
-          <a:bodyPr rtlCol="0" anchor="ctr" wrap="square"/>
+          <a:bodyPr wrap="square" rtlCol="0" anchor="ctr"/>
           <a:lstStyle/>
           <a:p>
             <a:pPr algn="ctr">
@@ -3452,7 +3485,7 @@
           </a:fontRef>
         </p:style>
         <p:txBody>
-          <a:bodyPr rtlCol="0" anchor="ctr" wrap="square"/>
+          <a:bodyPr wrap="square" rtlCol="0" anchor="ctr"/>
           <a:lstStyle/>
           <a:p>
             <a:pPr algn="ctr">
@@ -3491,7 +3524,7 @@
 </file>
 
 <file path=ppt/slides/slide10.xml><?xml version="1.0" encoding="utf-8"?>
-<p:sld xmlns:a="http://schemas.openxmlformats.org/drawingml/2006/main" xmlns:p="http://schemas.openxmlformats.org/presentationml/2006/main" xmlns:r="http://schemas.openxmlformats.org/officeDocument/2006/relationships">
+<p:sld xmlns:a="http://schemas.openxmlformats.org/drawingml/2006/main" xmlns:r="http://schemas.openxmlformats.org/officeDocument/2006/relationships" xmlns:p="http://schemas.openxmlformats.org/presentationml/2006/main">
   <p:cSld>
     <p:spTree>
       <p:nvGrpSpPr>
@@ -3499,7 +3532,14 @@
         <p:cNvGrpSpPr/>
         <p:nvPr/>
       </p:nvGrpSpPr>
-      <p:grpSpPr/>
+      <p:grpSpPr>
+        <a:xfrm>
+          <a:off x="0" y="0"/>
+          <a:ext cx="0" cy="0"/>
+          <a:chOff x="0" y="0"/>
+          <a:chExt cx="0" cy="0"/>
+        </a:xfrm>
+      </p:grpSpPr>
       <p:sp>
         <p:nvSpPr>
           <p:cNvPr id="2" name="Rectangle 1"/>
@@ -3540,6 +3580,7 @@
           <a:lstStyle/>
           <a:p>
             <a:pPr algn="ctr"/>
+            <a:endParaRPr/>
           </a:p>
         </p:txBody>
       </p:sp>
@@ -3560,7 +3601,7 @@
           <a:noFill/>
         </p:spPr>
         <p:txBody>
-          <a:bodyPr wrap="square" lIns="0" rIns="0" tIns="0" bIns="0">
+          <a:bodyPr wrap="square" lIns="0" tIns="0" rIns="0" bIns="0">
             <a:spAutoFit/>
           </a:bodyPr>
           <a:lstStyle/>
@@ -3596,7 +3637,7 @@
           <a:noFill/>
         </p:spPr>
         <p:txBody>
-          <a:bodyPr wrap="square" lIns="0" rIns="0" tIns="0" bIns="0">
+          <a:bodyPr wrap="square" lIns="0" tIns="0" rIns="0" bIns="0">
             <a:spAutoFit/>
           </a:bodyPr>
           <a:lstStyle/>
@@ -3632,7 +3673,7 @@
           <a:noFill/>
         </p:spPr>
         <p:txBody>
-          <a:bodyPr wrap="square" lIns="0" rIns="0" tIns="0" bIns="0">
+          <a:bodyPr wrap="square" lIns="0" tIns="0" rIns="0" bIns="0">
             <a:spAutoFit/>
           </a:bodyPr>
           <a:lstStyle/>
@@ -3713,7 +3754,7 @@
           </a:fontRef>
         </p:style>
         <p:txBody>
-          <a:bodyPr rtlCol="0" anchor="ctr" wrap="square" lIns="365760" rIns="365760" tIns="365760"/>
+          <a:bodyPr wrap="square" lIns="365760" tIns="365760" rIns="365760" rtlCol="0" anchor="ctr"/>
           <a:lstStyle/>
           <a:p>
             <a:pPr algn="ctr">
@@ -3846,7 +3887,7 @@
           </a:fontRef>
         </p:style>
         <p:txBody>
-          <a:bodyPr rtlCol="0" anchor="ctr" wrap="square" lIns="365760" rIns="365760" tIns="365760"/>
+          <a:bodyPr wrap="square" lIns="365760" tIns="365760" rIns="365760" rtlCol="0" anchor="ctr"/>
           <a:lstStyle/>
           <a:p>
             <a:pPr algn="ctr">
@@ -3950,7 +3991,7 @@
 </file>
 
 <file path=ppt/slides/slide11.xml><?xml version="1.0" encoding="utf-8"?>
-<p:sld xmlns:a="http://schemas.openxmlformats.org/drawingml/2006/main" xmlns:p="http://schemas.openxmlformats.org/presentationml/2006/main" xmlns:r="http://schemas.openxmlformats.org/officeDocument/2006/relationships">
+<p:sld xmlns:a="http://schemas.openxmlformats.org/drawingml/2006/main" xmlns:r="http://schemas.openxmlformats.org/officeDocument/2006/relationships" xmlns:p="http://schemas.openxmlformats.org/presentationml/2006/main">
   <p:cSld>
     <p:spTree>
       <p:nvGrpSpPr>
@@ -3958,7 +3999,14 @@
         <p:cNvGrpSpPr/>
         <p:nvPr/>
       </p:nvGrpSpPr>
-      <p:grpSpPr/>
+      <p:grpSpPr>
+        <a:xfrm>
+          <a:off x="0" y="0"/>
+          <a:ext cx="0" cy="0"/>
+          <a:chOff x="0" y="0"/>
+          <a:chExt cx="0" cy="0"/>
+        </a:xfrm>
+      </p:grpSpPr>
       <p:sp>
         <p:nvSpPr>
           <p:cNvPr id="2" name="Rectangle 1"/>
@@ -3999,6 +4047,7 @@
           <a:lstStyle/>
           <a:p>
             <a:pPr algn="ctr"/>
+            <a:endParaRPr/>
           </a:p>
         </p:txBody>
       </p:sp>
@@ -4019,7 +4068,7 @@
           <a:noFill/>
         </p:spPr>
         <p:txBody>
-          <a:bodyPr wrap="square" lIns="0" rIns="0" tIns="0" bIns="0">
+          <a:bodyPr wrap="square" lIns="0" tIns="0" rIns="0" bIns="0">
             <a:spAutoFit/>
           </a:bodyPr>
           <a:lstStyle/>
@@ -4055,7 +4104,7 @@
           <a:noFill/>
         </p:spPr>
         <p:txBody>
-          <a:bodyPr wrap="square" lIns="0" rIns="0" tIns="0" bIns="0">
+          <a:bodyPr wrap="square" lIns="0" tIns="0" rIns="0" bIns="0">
             <a:spAutoFit/>
           </a:bodyPr>
           <a:lstStyle/>
@@ -4091,7 +4140,7 @@
           <a:noFill/>
         </p:spPr>
         <p:txBody>
-          <a:bodyPr wrap="square" lIns="0" rIns="0" tIns="0" bIns="0">
+          <a:bodyPr wrap="square" lIns="0" tIns="0" rIns="0" bIns="0">
             <a:spAutoFit/>
           </a:bodyPr>
           <a:lstStyle/>
@@ -4172,7 +4221,7 @@
           </a:fontRef>
         </p:style>
         <p:txBody>
-          <a:bodyPr rtlCol="0" anchor="ctr" wrap="square" lIns="365760" rIns="365760" tIns="365760"/>
+          <a:bodyPr wrap="square" lIns="365760" tIns="365760" rIns="365760" rtlCol="0" anchor="ctr"/>
           <a:lstStyle/>
           <a:p>
             <a:pPr algn="ctr">
@@ -4321,7 +4370,7 @@
           </a:fontRef>
         </p:style>
         <p:txBody>
-          <a:bodyPr rtlCol="0" anchor="ctr" wrap="square" lIns="365760" rIns="365760" tIns="365760"/>
+          <a:bodyPr wrap="square" lIns="365760" tIns="365760" rIns="365760" rtlCol="0" anchor="ctr"/>
           <a:lstStyle/>
           <a:p>
             <a:pPr algn="ctr">
@@ -4441,7 +4490,7 @@
 </file>
 
 <file path=ppt/slides/slide12.xml><?xml version="1.0" encoding="utf-8"?>
-<p:sld xmlns:a="http://schemas.openxmlformats.org/drawingml/2006/main" xmlns:p="http://schemas.openxmlformats.org/presentationml/2006/main" xmlns:r="http://schemas.openxmlformats.org/officeDocument/2006/relationships">
+<p:sld xmlns:a="http://schemas.openxmlformats.org/drawingml/2006/main" xmlns:r="http://schemas.openxmlformats.org/officeDocument/2006/relationships" xmlns:p="http://schemas.openxmlformats.org/presentationml/2006/main">
   <p:cSld>
     <p:spTree>
       <p:nvGrpSpPr>
@@ -4449,7 +4498,14 @@
         <p:cNvGrpSpPr/>
         <p:nvPr/>
       </p:nvGrpSpPr>
-      <p:grpSpPr/>
+      <p:grpSpPr>
+        <a:xfrm>
+          <a:off x="0" y="0"/>
+          <a:ext cx="0" cy="0"/>
+          <a:chOff x="0" y="0"/>
+          <a:chExt cx="0" cy="0"/>
+        </a:xfrm>
+      </p:grpSpPr>
       <p:sp>
         <p:nvSpPr>
           <p:cNvPr id="2" name="Rectangle 1"/>
@@ -4490,6 +4546,7 @@
           <a:lstStyle/>
           <a:p>
             <a:pPr algn="ctr"/>
+            <a:endParaRPr/>
           </a:p>
         </p:txBody>
       </p:sp>
@@ -4510,7 +4567,7 @@
           <a:noFill/>
         </p:spPr>
         <p:txBody>
-          <a:bodyPr wrap="square" lIns="0" rIns="0" tIns="0" bIns="0">
+          <a:bodyPr wrap="square" lIns="0" tIns="0" rIns="0" bIns="0">
             <a:spAutoFit/>
           </a:bodyPr>
           <a:lstStyle/>
@@ -4546,7 +4603,7 @@
           <a:noFill/>
         </p:spPr>
         <p:txBody>
-          <a:bodyPr wrap="square" lIns="0" rIns="0" tIns="0" bIns="0">
+          <a:bodyPr wrap="square" lIns="0" tIns="0" rIns="0" bIns="0">
             <a:spAutoFit/>
           </a:bodyPr>
           <a:lstStyle/>
@@ -4582,7 +4639,7 @@
           <a:noFill/>
         </p:spPr>
         <p:txBody>
-          <a:bodyPr wrap="square" lIns="0" rIns="0" tIns="0" bIns="0">
+          <a:bodyPr wrap="square" lIns="0" tIns="0" rIns="0" bIns="0">
             <a:spAutoFit/>
           </a:bodyPr>
           <a:lstStyle/>
@@ -4663,7 +4720,7 @@
           </a:fontRef>
         </p:style>
         <p:txBody>
-          <a:bodyPr rtlCol="0" anchor="ctr" wrap="square" lIns="228600" rIns="228600" tIns="274320"/>
+          <a:bodyPr wrap="square" lIns="228600" tIns="274320" rIns="228600" rtlCol="0" anchor="ctr"/>
           <a:lstStyle/>
           <a:p>
             <a:pPr algn="ctr">
@@ -4736,6 +4793,7 @@
           <a:lstStyle/>
           <a:p>
             <a:pPr algn="ctr"/>
+            <a:endParaRPr/>
           </a:p>
         </p:txBody>
       </p:sp>
@@ -4777,7 +4835,7 @@
           </a:fontRef>
         </p:style>
         <p:txBody>
-          <a:bodyPr rtlCol="0" anchor="ctr" wrap="square" lIns="228600" rIns="228600" tIns="274320"/>
+          <a:bodyPr wrap="square" lIns="228600" tIns="274320" rIns="228600" rtlCol="0" anchor="ctr"/>
           <a:lstStyle/>
           <a:p>
             <a:pPr algn="ctr">
@@ -4850,6 +4908,7 @@
           <a:lstStyle/>
           <a:p>
             <a:pPr algn="ctr"/>
+            <a:endParaRPr/>
           </a:p>
         </p:txBody>
       </p:sp>
@@ -4891,7 +4950,7 @@
           </a:fontRef>
         </p:style>
         <p:txBody>
-          <a:bodyPr rtlCol="0" anchor="ctr" wrap="square" lIns="228600" rIns="228600" tIns="274320"/>
+          <a:bodyPr wrap="square" lIns="228600" tIns="274320" rIns="228600" rtlCol="0" anchor="ctr"/>
           <a:lstStyle/>
           <a:p>
             <a:pPr algn="ctr">
@@ -4964,6 +5023,7 @@
           <a:lstStyle/>
           <a:p>
             <a:pPr algn="ctr"/>
+            <a:endParaRPr/>
           </a:p>
         </p:txBody>
       </p:sp>
@@ -5005,7 +5065,7 @@
           </a:fontRef>
         </p:style>
         <p:txBody>
-          <a:bodyPr rtlCol="0" anchor="ctr" wrap="square" lIns="228600" rIns="228600" tIns="274320"/>
+          <a:bodyPr wrap="square" lIns="228600" tIns="274320" rIns="228600" rtlCol="0" anchor="ctr"/>
           <a:lstStyle/>
           <a:p>
             <a:pPr algn="ctr">
@@ -5078,6 +5138,7 @@
           <a:lstStyle/>
           <a:p>
             <a:pPr algn="ctr"/>
+            <a:endParaRPr/>
           </a:p>
         </p:txBody>
       </p:sp>
@@ -5119,7 +5180,7 @@
           </a:fontRef>
         </p:style>
         <p:txBody>
-          <a:bodyPr rtlCol="0" anchor="ctr" wrap="square" lIns="365760" rIns="365760" tIns="164592"/>
+          <a:bodyPr wrap="square" lIns="365760" tIns="164592" rIns="365760" rtlCol="0" anchor="ctr"/>
           <a:lstStyle/>
           <a:p>
             <a:pPr algn="ctr">
@@ -5161,7 +5222,7 @@
 </file>
 
 <file path=ppt/slides/slide13.xml><?xml version="1.0" encoding="utf-8"?>
-<p:sld xmlns:a="http://schemas.openxmlformats.org/drawingml/2006/main" xmlns:p="http://schemas.openxmlformats.org/presentationml/2006/main" xmlns:r="http://schemas.openxmlformats.org/officeDocument/2006/relationships">
+<p:sld xmlns:a="http://schemas.openxmlformats.org/drawingml/2006/main" xmlns:r="http://schemas.openxmlformats.org/officeDocument/2006/relationships" xmlns:p="http://schemas.openxmlformats.org/presentationml/2006/main">
   <p:cSld>
     <p:spTree>
       <p:nvGrpSpPr>
@@ -5169,7 +5230,14 @@
         <p:cNvGrpSpPr/>
         <p:nvPr/>
       </p:nvGrpSpPr>
-      <p:grpSpPr/>
+      <p:grpSpPr>
+        <a:xfrm>
+          <a:off x="0" y="0"/>
+          <a:ext cx="0" cy="0"/>
+          <a:chOff x="0" y="0"/>
+          <a:chExt cx="0" cy="0"/>
+        </a:xfrm>
+      </p:grpSpPr>
       <p:sp>
         <p:nvSpPr>
           <p:cNvPr id="2" name="Rectangle 1"/>
@@ -5210,6 +5278,7 @@
           <a:lstStyle/>
           <a:p>
             <a:pPr algn="ctr"/>
+            <a:endParaRPr/>
           </a:p>
         </p:txBody>
       </p:sp>
@@ -5253,6 +5322,7 @@
           <a:lstStyle/>
           <a:p>
             <a:pPr algn="ctr"/>
+            <a:endParaRPr/>
           </a:p>
         </p:txBody>
       </p:sp>
@@ -5297,7 +5367,7 @@
           <a:noFill/>
         </p:spPr>
         <p:txBody>
-          <a:bodyPr wrap="square" lIns="0" rIns="0" tIns="0" bIns="0">
+          <a:bodyPr wrap="square" lIns="0" tIns="0" rIns="0" bIns="0">
             <a:spAutoFit/>
           </a:bodyPr>
           <a:lstStyle/>
@@ -5386,7 +5456,7 @@
           </a:fontRef>
         </p:style>
         <p:txBody>
-          <a:bodyPr rtlCol="0" anchor="ctr" wrap="square" lIns="274320" rIns="274320" tIns="228600"/>
+          <a:bodyPr wrap="square" lIns="274320" tIns="228600" rIns="274320" rtlCol="0" anchor="ctr"/>
           <a:lstStyle/>
           <a:p>
             <a:pPr algn="ctr">
@@ -5457,7 +5527,7 @@
           </a:fontRef>
         </p:style>
         <p:txBody>
-          <a:bodyPr rtlCol="0" anchor="ctr" wrap="square" lIns="274320" rIns="274320" tIns="228600"/>
+          <a:bodyPr wrap="square" lIns="274320" tIns="228600" rIns="274320" rtlCol="0" anchor="ctr"/>
           <a:lstStyle/>
           <a:p>
             <a:pPr algn="ctr">
@@ -5528,7 +5598,7 @@
           </a:fontRef>
         </p:style>
         <p:txBody>
-          <a:bodyPr rtlCol="0" anchor="ctr" wrap="square" lIns="274320" rIns="274320" tIns="228600"/>
+          <a:bodyPr wrap="square" lIns="274320" tIns="228600" rIns="274320" rtlCol="0" anchor="ctr"/>
           <a:lstStyle/>
           <a:p>
             <a:pPr algn="ctr">
@@ -5570,7 +5640,7 @@
 </file>
 
 <file path=ppt/slides/slide2.xml><?xml version="1.0" encoding="utf-8"?>
-<p:sld xmlns:a="http://schemas.openxmlformats.org/drawingml/2006/main" xmlns:p="http://schemas.openxmlformats.org/presentationml/2006/main" xmlns:r="http://schemas.openxmlformats.org/officeDocument/2006/relationships">
+<p:sld xmlns:a="http://schemas.openxmlformats.org/drawingml/2006/main" xmlns:r="http://schemas.openxmlformats.org/officeDocument/2006/relationships" xmlns:p="http://schemas.openxmlformats.org/presentationml/2006/main">
   <p:cSld>
     <p:spTree>
       <p:nvGrpSpPr>
@@ -5578,7 +5648,14 @@
         <p:cNvGrpSpPr/>
         <p:nvPr/>
       </p:nvGrpSpPr>
-      <p:grpSpPr/>
+      <p:grpSpPr>
+        <a:xfrm>
+          <a:off x="0" y="0"/>
+          <a:ext cx="0" cy="0"/>
+          <a:chOff x="0" y="0"/>
+          <a:chExt cx="0" cy="0"/>
+        </a:xfrm>
+      </p:grpSpPr>
       <p:sp>
         <p:nvSpPr>
           <p:cNvPr id="2" name="Rectangle 1"/>
@@ -5619,6 +5696,7 @@
           <a:lstStyle/>
           <a:p>
             <a:pPr algn="ctr"/>
+            <a:endParaRPr/>
           </a:p>
         </p:txBody>
       </p:sp>
@@ -5639,7 +5717,7 @@
           <a:noFill/>
         </p:spPr>
         <p:txBody>
-          <a:bodyPr wrap="square" lIns="0" rIns="0" tIns="0" bIns="0">
+          <a:bodyPr wrap="square" lIns="0" tIns="0" rIns="0" bIns="0">
             <a:spAutoFit/>
           </a:bodyPr>
           <a:lstStyle/>
@@ -5675,7 +5753,7 @@
           <a:noFill/>
         </p:spPr>
         <p:txBody>
-          <a:bodyPr wrap="square" lIns="0" rIns="0" tIns="0" bIns="0">
+          <a:bodyPr wrap="square" lIns="0" tIns="0" rIns="0" bIns="0">
             <a:spAutoFit/>
           </a:bodyPr>
           <a:lstStyle/>
@@ -5711,7 +5789,7 @@
           <a:noFill/>
         </p:spPr>
         <p:txBody>
-          <a:bodyPr wrap="square" lIns="0" rIns="0" tIns="0" bIns="0">
+          <a:bodyPr wrap="square" lIns="0" tIns="0" rIns="0" bIns="0">
             <a:spAutoFit/>
           </a:bodyPr>
           <a:lstStyle/>
@@ -5792,7 +5870,7 @@
           </a:fontRef>
         </p:style>
         <p:txBody>
-          <a:bodyPr rtlCol="0" anchor="ctr" wrap="square" lIns="365760" rIns="365760" tIns="365760"/>
+          <a:bodyPr wrap="square" lIns="365760" tIns="365760" rIns="365760" rtlCol="0" anchor="ctr"/>
           <a:lstStyle/>
           <a:p>
             <a:pPr algn="ctr">
@@ -5952,6 +6030,7 @@
           <a:lstStyle/>
           <a:p>
             <a:pPr algn="ctr"/>
+            <a:endParaRPr/>
           </a:p>
         </p:txBody>
       </p:sp>
@@ -5993,7 +6072,7 @@
           </a:fontRef>
         </p:style>
         <p:txBody>
-          <a:bodyPr rtlCol="0" anchor="ctr" wrap="square" lIns="365760" rIns="365760" tIns="365760"/>
+          <a:bodyPr wrap="square" lIns="365760" tIns="365760" rIns="365760" rtlCol="0" anchor="ctr"/>
           <a:lstStyle/>
           <a:p>
             <a:pPr algn="ctr">
@@ -6008,6 +6087,7 @@
               </a:defRPr>
             </a:pPr>
             <a:r>
+              <a:rPr dirty="0"/>
               <a:t>LA RESPUESTA: PLATAFORMA INTEGRAL ADMOND</a:t>
             </a:r>
           </a:p>
@@ -6024,16 +6104,177 @@
               </a:defRPr>
             </a:pPr>
             <a:r>
-              <a:t>[OK] Un solo centro de comando: </a:t>
-            </a:r>
-            <a:r>
-              <a:rPr sz="1050" b="0">
+              <a:rPr dirty="0"/>
+              <a:t> Un solo </a:t>
+            </a:r>
+            <a:r>
+              <a:rPr dirty="0" err="1"/>
+              <a:t>centro</a:t>
+            </a:r>
+            <a:r>
+              <a:rPr dirty="0"/>
+              <a:t> de </a:t>
+            </a:r>
+            <a:r>
+              <a:rPr dirty="0" err="1"/>
+              <a:t>comando</a:t>
+            </a:r>
+            <a:r>
+              <a:rPr dirty="0"/>
+              <a:t>: </a:t>
+            </a:r>
+            <a:r>
+              <a:rPr sz="1050" b="0" dirty="0">
                 <a:solidFill>
                   <a:srgbClr val="475569"/>
                 </a:solidFill>
                 <a:latin typeface="Segoe UI"/>
               </a:rPr>
-              <a:t>Tareas, chat corporativo, correos, reuniones y finanzas conectadas en un mismo lugar.</a:t>
+              <a:t>Tareas, chat </a:t>
+            </a:r>
+            <a:r>
+              <a:rPr sz="1050" b="0" dirty="0" err="1">
+                <a:solidFill>
+                  <a:srgbClr val="475569"/>
+                </a:solidFill>
+                <a:latin typeface="Segoe UI"/>
+              </a:rPr>
+              <a:t>corporativo</a:t>
+            </a:r>
+            <a:r>
+              <a:rPr sz="1050" b="0" dirty="0">
+                <a:solidFill>
+                  <a:srgbClr val="475569"/>
+                </a:solidFill>
+                <a:latin typeface="Segoe UI"/>
+              </a:rPr>
+              <a:t>, </a:t>
+            </a:r>
+            <a:r>
+              <a:rPr sz="1050" b="0" dirty="0" err="1">
+                <a:solidFill>
+                  <a:srgbClr val="475569"/>
+                </a:solidFill>
+                <a:latin typeface="Segoe UI"/>
+              </a:rPr>
+              <a:t>correos</a:t>
+            </a:r>
+            <a:r>
+              <a:rPr sz="1050" b="0" dirty="0">
+                <a:solidFill>
+                  <a:srgbClr val="475569"/>
+                </a:solidFill>
+                <a:latin typeface="Segoe UI"/>
+              </a:rPr>
+              <a:t>, </a:t>
+            </a:r>
+            <a:r>
+              <a:rPr sz="1050" b="0" dirty="0" err="1">
+                <a:solidFill>
+                  <a:srgbClr val="475569"/>
+                </a:solidFill>
+                <a:latin typeface="Segoe UI"/>
+              </a:rPr>
+              <a:t>reuniones</a:t>
+            </a:r>
+            <a:r>
+              <a:rPr sz="1050" b="0" dirty="0">
+                <a:solidFill>
+                  <a:srgbClr val="475569"/>
+                </a:solidFill>
+                <a:latin typeface="Segoe UI"/>
+              </a:rPr>
+              <a:t> y </a:t>
+            </a:r>
+            <a:r>
+              <a:rPr sz="1050" b="0" dirty="0" err="1">
+                <a:solidFill>
+                  <a:srgbClr val="475569"/>
+                </a:solidFill>
+                <a:latin typeface="Segoe UI"/>
+              </a:rPr>
+              <a:t>finanzas</a:t>
+            </a:r>
+            <a:r>
+              <a:rPr sz="1050" b="0" dirty="0">
+                <a:solidFill>
+                  <a:srgbClr val="475569"/>
+                </a:solidFill>
+                <a:latin typeface="Segoe UI"/>
+              </a:rPr>
+              <a:t> </a:t>
+            </a:r>
+            <a:r>
+              <a:rPr sz="1050" b="0" dirty="0" err="1">
+                <a:solidFill>
+                  <a:srgbClr val="475569"/>
+                </a:solidFill>
+                <a:latin typeface="Segoe UI"/>
+              </a:rPr>
+              <a:t>conectadas</a:t>
+            </a:r>
+            <a:r>
+              <a:rPr sz="1050" b="0" dirty="0">
+                <a:solidFill>
+                  <a:srgbClr val="475569"/>
+                </a:solidFill>
+                <a:latin typeface="Segoe UI"/>
+              </a:rPr>
+              <a:t> </a:t>
+            </a:r>
+            <a:r>
+              <a:rPr sz="1050" b="0" dirty="0" err="1">
+                <a:solidFill>
+                  <a:srgbClr val="475569"/>
+                </a:solidFill>
+                <a:latin typeface="Segoe UI"/>
+              </a:rPr>
+              <a:t>en</a:t>
+            </a:r>
+            <a:r>
+              <a:rPr sz="1050" b="0" dirty="0">
+                <a:solidFill>
+                  <a:srgbClr val="475569"/>
+                </a:solidFill>
+                <a:latin typeface="Segoe UI"/>
+              </a:rPr>
+              <a:t> un </a:t>
+            </a:r>
+            <a:r>
+              <a:rPr sz="1050" b="0" dirty="0" err="1">
+                <a:solidFill>
+                  <a:srgbClr val="475569"/>
+                </a:solidFill>
+                <a:latin typeface="Segoe UI"/>
+              </a:rPr>
+              <a:t>mismo</a:t>
+            </a:r>
+            <a:r>
+              <a:rPr sz="1050" b="0" dirty="0">
+                <a:solidFill>
+                  <a:srgbClr val="475569"/>
+                </a:solidFill>
+                <a:latin typeface="Segoe UI"/>
+              </a:rPr>
+              <a:t> </a:t>
+            </a:r>
+            <a:r>
+              <a:rPr sz="1050" b="0" dirty="0" err="1">
+                <a:solidFill>
+                  <a:srgbClr val="475569"/>
+                </a:solidFill>
+                <a:latin typeface="Segoe UI"/>
+              </a:rPr>
+              <a:t>lugar</a:t>
+            </a:r>
+            <a:r>
+              <a:rPr sz="1050" b="0" dirty="0">
+                <a:solidFill>
+                  <a:srgbClr val="475569"/>
+                </a:solidFill>
+                <a:latin typeface="Segoe UI"/>
+              </a:rPr>
+              <a:t>.</a:t>
             </a:r>
           </a:p>
           <a:p>
@@ -6049,16 +6290,195 @@
               </a:defRPr>
             </a:pPr>
             <a:r>
-              <a:t>[OK] Administración básica y efectiva: </a:t>
-            </a:r>
-            <a:r>
-              <a:rPr sz="1050" b="0">
+              <a:rPr dirty="0"/>
+              <a:t> Administración </a:t>
+            </a:r>
+            <a:r>
+              <a:rPr dirty="0" err="1"/>
+              <a:t>básica</a:t>
+            </a:r>
+            <a:r>
+              <a:rPr dirty="0"/>
+              <a:t> y </a:t>
+            </a:r>
+            <a:r>
+              <a:rPr dirty="0" err="1"/>
+              <a:t>efectiva</a:t>
+            </a:r>
+            <a:r>
+              <a:rPr dirty="0"/>
+              <a:t>: </a:t>
+            </a:r>
+            <a:r>
+              <a:rPr sz="1050" b="0" dirty="0">
                 <a:solidFill>
                   <a:srgbClr val="475569"/>
                 </a:solidFill>
                 <a:latin typeface="Segoe UI"/>
               </a:rPr>
-              <a:t>Lo indispensable que necesita una empresa para fluir: caja, pagos, nómina quincenal y folios.</a:t>
+              <a:t>Lo indispensable </a:t>
+            </a:r>
+            <a:r>
+              <a:rPr sz="1050" b="0" dirty="0" err="1">
+                <a:solidFill>
+                  <a:srgbClr val="475569"/>
+                </a:solidFill>
+                <a:latin typeface="Segoe UI"/>
+              </a:rPr>
+              <a:t>que</a:t>
+            </a:r>
+            <a:r>
+              <a:rPr sz="1050" b="0" dirty="0">
+                <a:solidFill>
+                  <a:srgbClr val="475569"/>
+                </a:solidFill>
+                <a:latin typeface="Segoe UI"/>
+              </a:rPr>
+              <a:t> </a:t>
+            </a:r>
+            <a:r>
+              <a:rPr sz="1050" b="0" dirty="0" err="1">
+                <a:solidFill>
+                  <a:srgbClr val="475569"/>
+                </a:solidFill>
+                <a:latin typeface="Segoe UI"/>
+              </a:rPr>
+              <a:t>necesita</a:t>
+            </a:r>
+            <a:r>
+              <a:rPr sz="1050" b="0" dirty="0">
+                <a:solidFill>
+                  <a:srgbClr val="475569"/>
+                </a:solidFill>
+                <a:latin typeface="Segoe UI"/>
+              </a:rPr>
+              <a:t> </a:t>
+            </a:r>
+            <a:r>
+              <a:rPr sz="1050" b="0" dirty="0" err="1">
+                <a:solidFill>
+                  <a:srgbClr val="475569"/>
+                </a:solidFill>
+                <a:latin typeface="Segoe UI"/>
+              </a:rPr>
+              <a:t>una</a:t>
+            </a:r>
+            <a:r>
+              <a:rPr sz="1050" b="0" dirty="0">
+                <a:solidFill>
+                  <a:srgbClr val="475569"/>
+                </a:solidFill>
+                <a:latin typeface="Segoe UI"/>
+              </a:rPr>
+              <a:t> </a:t>
+            </a:r>
+            <a:r>
+              <a:rPr sz="1050" b="0" dirty="0" err="1">
+                <a:solidFill>
+                  <a:srgbClr val="475569"/>
+                </a:solidFill>
+                <a:latin typeface="Segoe UI"/>
+              </a:rPr>
+              <a:t>empresa</a:t>
+            </a:r>
+            <a:r>
+              <a:rPr sz="1050" b="0" dirty="0">
+                <a:solidFill>
+                  <a:srgbClr val="475569"/>
+                </a:solidFill>
+                <a:latin typeface="Segoe UI"/>
+              </a:rPr>
+              <a:t> para </a:t>
+            </a:r>
+            <a:r>
+              <a:rPr sz="1050" b="0" dirty="0" err="1">
+                <a:solidFill>
+                  <a:srgbClr val="475569"/>
+                </a:solidFill>
+                <a:latin typeface="Segoe UI"/>
+              </a:rPr>
+              <a:t>fluir</a:t>
+            </a:r>
+            <a:r>
+              <a:rPr sz="1050" b="0" dirty="0">
+                <a:solidFill>
+                  <a:srgbClr val="475569"/>
+                </a:solidFill>
+                <a:latin typeface="Segoe UI"/>
+              </a:rPr>
+              <a:t>: </a:t>
+            </a:r>
+            <a:r>
+              <a:rPr sz="1050" b="0" dirty="0" err="1">
+                <a:solidFill>
+                  <a:srgbClr val="475569"/>
+                </a:solidFill>
+                <a:latin typeface="Segoe UI"/>
+              </a:rPr>
+              <a:t>caja</a:t>
+            </a:r>
+            <a:r>
+              <a:rPr sz="1050" b="0" dirty="0">
+                <a:solidFill>
+                  <a:srgbClr val="475569"/>
+                </a:solidFill>
+                <a:latin typeface="Segoe UI"/>
+              </a:rPr>
+              <a:t>, </a:t>
+            </a:r>
+            <a:r>
+              <a:rPr sz="1050" b="0" dirty="0" err="1">
+                <a:solidFill>
+                  <a:srgbClr val="475569"/>
+                </a:solidFill>
+                <a:latin typeface="Segoe UI"/>
+              </a:rPr>
+              <a:t>pagos</a:t>
+            </a:r>
+            <a:r>
+              <a:rPr sz="1050" b="0" dirty="0">
+                <a:solidFill>
+                  <a:srgbClr val="475569"/>
+                </a:solidFill>
+                <a:latin typeface="Segoe UI"/>
+              </a:rPr>
+              <a:t>, </a:t>
+            </a:r>
+            <a:r>
+              <a:rPr sz="1050" b="0" dirty="0" err="1">
+                <a:solidFill>
+                  <a:srgbClr val="475569"/>
+                </a:solidFill>
+                <a:latin typeface="Segoe UI"/>
+              </a:rPr>
+              <a:t>nómina</a:t>
+            </a:r>
+            <a:r>
+              <a:rPr sz="1050" b="0" dirty="0">
+                <a:solidFill>
+                  <a:srgbClr val="475569"/>
+                </a:solidFill>
+                <a:latin typeface="Segoe UI"/>
+              </a:rPr>
+              <a:t> </a:t>
+            </a:r>
+            <a:r>
+              <a:rPr sz="1050" b="0" dirty="0" err="1">
+                <a:solidFill>
+                  <a:srgbClr val="475569"/>
+                </a:solidFill>
+                <a:latin typeface="Segoe UI"/>
+              </a:rPr>
+              <a:t>quincenal</a:t>
+            </a:r>
+            <a:r>
+              <a:rPr sz="1050" b="0" dirty="0">
+                <a:solidFill>
+                  <a:srgbClr val="475569"/>
+                </a:solidFill>
+                <a:latin typeface="Segoe UI"/>
+              </a:rPr>
+              <a:t> y folios.</a:t>
             </a:r>
           </a:p>
           <a:p>
@@ -6074,16 +6494,168 @@
               </a:defRPr>
             </a:pPr>
             <a:r>
-              <a:t>[OK] Disponibilidad total en iOS y Android: </a:t>
-            </a:r>
-            <a:r>
-              <a:rPr sz="1050" b="0">
+              <a:rPr dirty="0"/>
+              <a:t> </a:t>
+            </a:r>
+            <a:r>
+              <a:rPr dirty="0" err="1"/>
+              <a:t>Disponibilidad</a:t>
+            </a:r>
+            <a:r>
+              <a:rPr dirty="0"/>
+              <a:t> total </a:t>
+            </a:r>
+            <a:r>
+              <a:rPr dirty="0" err="1"/>
+              <a:t>en</a:t>
+            </a:r>
+            <a:r>
+              <a:rPr dirty="0"/>
+              <a:t> iOS y Android: </a:t>
+            </a:r>
+            <a:r>
+              <a:rPr sz="1050" b="0" dirty="0" err="1">
                 <a:solidFill>
                   <a:srgbClr val="475569"/>
                 </a:solidFill>
                 <a:latin typeface="Segoe UI"/>
               </a:rPr>
-              <a:t>Directivos y colaboradores operan y monitorean desde cualquier teléfono, tablet o computadora.</a:t>
+              <a:t>Directivos</a:t>
+            </a:r>
+            <a:r>
+              <a:rPr sz="1050" b="0" dirty="0">
+                <a:solidFill>
+                  <a:srgbClr val="475569"/>
+                </a:solidFill>
+                <a:latin typeface="Segoe UI"/>
+              </a:rPr>
+              <a:t> y </a:t>
+            </a:r>
+            <a:r>
+              <a:rPr sz="1050" b="0" dirty="0" err="1">
+                <a:solidFill>
+                  <a:srgbClr val="475569"/>
+                </a:solidFill>
+                <a:latin typeface="Segoe UI"/>
+              </a:rPr>
+              <a:t>colaboradores</a:t>
+            </a:r>
+            <a:r>
+              <a:rPr sz="1050" b="0" dirty="0">
+                <a:solidFill>
+                  <a:srgbClr val="475569"/>
+                </a:solidFill>
+                <a:latin typeface="Segoe UI"/>
+              </a:rPr>
+              <a:t> </a:t>
+            </a:r>
+            <a:r>
+              <a:rPr sz="1050" b="0" dirty="0" err="1">
+                <a:solidFill>
+                  <a:srgbClr val="475569"/>
+                </a:solidFill>
+                <a:latin typeface="Segoe UI"/>
+              </a:rPr>
+              <a:t>operan</a:t>
+            </a:r>
+            <a:r>
+              <a:rPr sz="1050" b="0" dirty="0">
+                <a:solidFill>
+                  <a:srgbClr val="475569"/>
+                </a:solidFill>
+                <a:latin typeface="Segoe UI"/>
+              </a:rPr>
+              <a:t> y </a:t>
+            </a:r>
+            <a:r>
+              <a:rPr sz="1050" b="0" dirty="0" err="1">
+                <a:solidFill>
+                  <a:srgbClr val="475569"/>
+                </a:solidFill>
+                <a:latin typeface="Segoe UI"/>
+              </a:rPr>
+              <a:t>monitorean</a:t>
+            </a:r>
+            <a:r>
+              <a:rPr sz="1050" b="0" dirty="0">
+                <a:solidFill>
+                  <a:srgbClr val="475569"/>
+                </a:solidFill>
+                <a:latin typeface="Segoe UI"/>
+              </a:rPr>
+              <a:t> </a:t>
+            </a:r>
+            <a:r>
+              <a:rPr sz="1050" b="0" dirty="0" err="1">
+                <a:solidFill>
+                  <a:srgbClr val="475569"/>
+                </a:solidFill>
+                <a:latin typeface="Segoe UI"/>
+              </a:rPr>
+              <a:t>desde</a:t>
+            </a:r>
+            <a:r>
+              <a:rPr sz="1050" b="0" dirty="0">
+                <a:solidFill>
+                  <a:srgbClr val="475569"/>
+                </a:solidFill>
+                <a:latin typeface="Segoe UI"/>
+              </a:rPr>
+              <a:t> </a:t>
+            </a:r>
+            <a:r>
+              <a:rPr sz="1050" b="0" dirty="0" err="1">
+                <a:solidFill>
+                  <a:srgbClr val="475569"/>
+                </a:solidFill>
+                <a:latin typeface="Segoe UI"/>
+              </a:rPr>
+              <a:t>cualquier</a:t>
+            </a:r>
+            <a:r>
+              <a:rPr sz="1050" b="0" dirty="0">
+                <a:solidFill>
+                  <a:srgbClr val="475569"/>
+                </a:solidFill>
+                <a:latin typeface="Segoe UI"/>
+              </a:rPr>
+              <a:t> </a:t>
+            </a:r>
+            <a:r>
+              <a:rPr sz="1050" b="0" dirty="0" err="1">
+                <a:solidFill>
+                  <a:srgbClr val="475569"/>
+                </a:solidFill>
+                <a:latin typeface="Segoe UI"/>
+              </a:rPr>
+              <a:t>teléfono</a:t>
+            </a:r>
+            <a:r>
+              <a:rPr sz="1050" b="0" dirty="0">
+                <a:solidFill>
+                  <a:srgbClr val="475569"/>
+                </a:solidFill>
+                <a:latin typeface="Segoe UI"/>
+              </a:rPr>
+              <a:t>, tablet o </a:t>
+            </a:r>
+            <a:r>
+              <a:rPr sz="1050" b="0" dirty="0" err="1">
+                <a:solidFill>
+                  <a:srgbClr val="475569"/>
+                </a:solidFill>
+                <a:latin typeface="Segoe UI"/>
+              </a:rPr>
+              <a:t>computadora</a:t>
+            </a:r>
+            <a:r>
+              <a:rPr sz="1050" b="0" dirty="0">
+                <a:solidFill>
+                  <a:srgbClr val="475569"/>
+                </a:solidFill>
+                <a:latin typeface="Segoe UI"/>
+              </a:rPr>
+              <a:t>.</a:t>
             </a:r>
           </a:p>
           <a:p>
@@ -6099,16 +6671,192 @@
               </a:defRPr>
             </a:pPr>
             <a:r>
-              <a:t>[OK] Información en tiempo real en la nube: </a:t>
-            </a:r>
-            <a:r>
-              <a:rPr sz="1050" b="0">
+              <a:rPr dirty="0"/>
+              <a:t> </a:t>
+            </a:r>
+            <a:r>
+              <a:rPr dirty="0" err="1"/>
+              <a:t>Información</a:t>
+            </a:r>
+            <a:r>
+              <a:rPr dirty="0"/>
+              <a:t> </a:t>
+            </a:r>
+            <a:r>
+              <a:rPr dirty="0" err="1"/>
+              <a:t>en</a:t>
+            </a:r>
+            <a:r>
+              <a:rPr dirty="0"/>
+              <a:t> </a:t>
+            </a:r>
+            <a:r>
+              <a:rPr dirty="0" err="1"/>
+              <a:t>tiempo</a:t>
+            </a:r>
+            <a:r>
+              <a:rPr dirty="0"/>
+              <a:t> real </a:t>
+            </a:r>
+            <a:r>
+              <a:rPr dirty="0" err="1"/>
+              <a:t>en</a:t>
+            </a:r>
+            <a:r>
+              <a:rPr dirty="0"/>
+              <a:t> la </a:t>
+            </a:r>
+            <a:r>
+              <a:rPr dirty="0" err="1"/>
+              <a:t>nube</a:t>
+            </a:r>
+            <a:r>
+              <a:rPr dirty="0"/>
+              <a:t>: </a:t>
+            </a:r>
+            <a:r>
+              <a:rPr sz="1050" b="0" dirty="0" err="1">
                 <a:solidFill>
                   <a:srgbClr val="475569"/>
                 </a:solidFill>
                 <a:latin typeface="Segoe UI"/>
               </a:rPr>
-              <a:t>Reportes visuales instantáneos para tomar decisiones gerenciales con datos 100% actualizados.</a:t>
+              <a:t>Reportes</a:t>
+            </a:r>
+            <a:r>
+              <a:rPr sz="1050" b="0" dirty="0">
+                <a:solidFill>
+                  <a:srgbClr val="475569"/>
+                </a:solidFill>
+                <a:latin typeface="Segoe UI"/>
+              </a:rPr>
+              <a:t> </a:t>
+            </a:r>
+            <a:r>
+              <a:rPr sz="1050" b="0" dirty="0" err="1">
+                <a:solidFill>
+                  <a:srgbClr val="475569"/>
+                </a:solidFill>
+                <a:latin typeface="Segoe UI"/>
+              </a:rPr>
+              <a:t>visuales</a:t>
+            </a:r>
+            <a:r>
+              <a:rPr sz="1050" b="0" dirty="0">
+                <a:solidFill>
+                  <a:srgbClr val="475569"/>
+                </a:solidFill>
+                <a:latin typeface="Segoe UI"/>
+              </a:rPr>
+              <a:t> </a:t>
+            </a:r>
+            <a:r>
+              <a:rPr sz="1050" b="0" dirty="0" err="1">
+                <a:solidFill>
+                  <a:srgbClr val="475569"/>
+                </a:solidFill>
+                <a:latin typeface="Segoe UI"/>
+              </a:rPr>
+              <a:t>instantáneos</a:t>
+            </a:r>
+            <a:r>
+              <a:rPr sz="1050" b="0" dirty="0">
+                <a:solidFill>
+                  <a:srgbClr val="475569"/>
+                </a:solidFill>
+                <a:latin typeface="Segoe UI"/>
+              </a:rPr>
+              <a:t> para </a:t>
+            </a:r>
+            <a:r>
+              <a:rPr sz="1050" b="0" dirty="0" err="1">
+                <a:solidFill>
+                  <a:srgbClr val="475569"/>
+                </a:solidFill>
+                <a:latin typeface="Segoe UI"/>
+              </a:rPr>
+              <a:t>tomar</a:t>
+            </a:r>
+            <a:r>
+              <a:rPr sz="1050" b="0" dirty="0">
+                <a:solidFill>
+                  <a:srgbClr val="475569"/>
+                </a:solidFill>
+                <a:latin typeface="Segoe UI"/>
+              </a:rPr>
+              <a:t> </a:t>
+            </a:r>
+            <a:r>
+              <a:rPr sz="1050" b="0" dirty="0" err="1">
+                <a:solidFill>
+                  <a:srgbClr val="475569"/>
+                </a:solidFill>
+                <a:latin typeface="Segoe UI"/>
+              </a:rPr>
+              <a:t>decisiones</a:t>
+            </a:r>
+            <a:r>
+              <a:rPr sz="1050" b="0" dirty="0">
+                <a:solidFill>
+                  <a:srgbClr val="475569"/>
+                </a:solidFill>
+                <a:latin typeface="Segoe UI"/>
+              </a:rPr>
+              <a:t> </a:t>
+            </a:r>
+            <a:r>
+              <a:rPr sz="1050" b="0" dirty="0" err="1">
+                <a:solidFill>
+                  <a:srgbClr val="475569"/>
+                </a:solidFill>
+                <a:latin typeface="Segoe UI"/>
+              </a:rPr>
+              <a:t>gerenciales</a:t>
+            </a:r>
+            <a:r>
+              <a:rPr sz="1050" b="0" dirty="0">
+                <a:solidFill>
+                  <a:srgbClr val="475569"/>
+                </a:solidFill>
+                <a:latin typeface="Segoe UI"/>
+              </a:rPr>
+              <a:t> con </a:t>
+            </a:r>
+            <a:r>
+              <a:rPr sz="1050" b="0" dirty="0" err="1">
+                <a:solidFill>
+                  <a:srgbClr val="475569"/>
+                </a:solidFill>
+                <a:latin typeface="Segoe UI"/>
+              </a:rPr>
+              <a:t>datos</a:t>
+            </a:r>
+            <a:r>
+              <a:rPr sz="1050" b="0" dirty="0">
+                <a:solidFill>
+                  <a:srgbClr val="475569"/>
+                </a:solidFill>
+                <a:latin typeface="Segoe UI"/>
+              </a:rPr>
+              <a:t> 100% </a:t>
+            </a:r>
+            <a:r>
+              <a:rPr sz="1050" b="0" dirty="0" err="1">
+                <a:solidFill>
+                  <a:srgbClr val="475569"/>
+                </a:solidFill>
+                <a:latin typeface="Segoe UI"/>
+              </a:rPr>
+              <a:t>actualizados</a:t>
+            </a:r>
+            <a:r>
+              <a:rPr sz="1050" b="0" dirty="0">
+                <a:solidFill>
+                  <a:srgbClr val="475569"/>
+                </a:solidFill>
+                <a:latin typeface="Segoe UI"/>
+              </a:rPr>
+              <a:t>.</a:t>
             </a:r>
           </a:p>
         </p:txBody>
@@ -6153,6 +6901,7 @@
           <a:lstStyle/>
           <a:p>
             <a:pPr algn="ctr"/>
+            <a:endParaRPr/>
           </a:p>
         </p:txBody>
       </p:sp>
@@ -6165,7 +6914,7 @@
 </file>
 
 <file path=ppt/slides/slide3.xml><?xml version="1.0" encoding="utf-8"?>
-<p:sld xmlns:a="http://schemas.openxmlformats.org/drawingml/2006/main" xmlns:p="http://schemas.openxmlformats.org/presentationml/2006/main" xmlns:r="http://schemas.openxmlformats.org/officeDocument/2006/relationships">
+<p:sld xmlns:a="http://schemas.openxmlformats.org/drawingml/2006/main" xmlns:r="http://schemas.openxmlformats.org/officeDocument/2006/relationships" xmlns:p="http://schemas.openxmlformats.org/presentationml/2006/main">
   <p:cSld>
     <p:spTree>
       <p:nvGrpSpPr>
@@ -6173,7 +6922,14 @@
         <p:cNvGrpSpPr/>
         <p:nvPr/>
       </p:nvGrpSpPr>
-      <p:grpSpPr/>
+      <p:grpSpPr>
+        <a:xfrm>
+          <a:off x="0" y="0"/>
+          <a:ext cx="0" cy="0"/>
+          <a:chOff x="0" y="0"/>
+          <a:chExt cx="0" cy="0"/>
+        </a:xfrm>
+      </p:grpSpPr>
       <p:sp>
         <p:nvSpPr>
           <p:cNvPr id="2" name="Rectangle 1"/>
@@ -6214,6 +6970,7 @@
           <a:lstStyle/>
           <a:p>
             <a:pPr algn="ctr"/>
+            <a:endParaRPr/>
           </a:p>
         </p:txBody>
       </p:sp>
@@ -6234,7 +6991,7 @@
           <a:noFill/>
         </p:spPr>
         <p:txBody>
-          <a:bodyPr wrap="square" lIns="0" rIns="0" tIns="0" bIns="0">
+          <a:bodyPr wrap="square" lIns="0" tIns="0" rIns="0" bIns="0">
             <a:spAutoFit/>
           </a:bodyPr>
           <a:lstStyle/>
@@ -6270,7 +7027,7 @@
           <a:noFill/>
         </p:spPr>
         <p:txBody>
-          <a:bodyPr wrap="square" lIns="0" rIns="0" tIns="0" bIns="0">
+          <a:bodyPr wrap="square" lIns="0" tIns="0" rIns="0" bIns="0">
             <a:spAutoFit/>
           </a:bodyPr>
           <a:lstStyle/>
@@ -6306,7 +7063,7 @@
           <a:noFill/>
         </p:spPr>
         <p:txBody>
-          <a:bodyPr wrap="square" lIns="0" rIns="0" tIns="0" bIns="0">
+          <a:bodyPr wrap="square" lIns="0" tIns="0" rIns="0" bIns="0">
             <a:spAutoFit/>
           </a:bodyPr>
           <a:lstStyle/>
@@ -6387,7 +7144,7 @@
           </a:fontRef>
         </p:style>
         <p:txBody>
-          <a:bodyPr rtlCol="0" anchor="ctr" wrap="square" lIns="228600" rIns="228600" tIns="228600"/>
+          <a:bodyPr wrap="square" lIns="228600" tIns="228600" rIns="228600" rtlCol="0" anchor="ctr"/>
           <a:lstStyle/>
           <a:p>
             <a:pPr algn="ctr">
@@ -6476,6 +7233,7 @@
           <a:lstStyle/>
           <a:p>
             <a:pPr algn="ctr"/>
+            <a:endParaRPr/>
           </a:p>
         </p:txBody>
       </p:sp>
@@ -6517,7 +7275,7 @@
           </a:fontRef>
         </p:style>
         <p:txBody>
-          <a:bodyPr rtlCol="0" anchor="ctr" wrap="square" lIns="228600" rIns="228600" tIns="228600"/>
+          <a:bodyPr wrap="square" lIns="228600" tIns="228600" rIns="228600" rtlCol="0" anchor="ctr"/>
           <a:lstStyle/>
           <a:p>
             <a:pPr algn="ctr">
@@ -6606,6 +7364,7 @@
           <a:lstStyle/>
           <a:p>
             <a:pPr algn="ctr"/>
+            <a:endParaRPr/>
           </a:p>
         </p:txBody>
       </p:sp>
@@ -6647,7 +7406,7 @@
           </a:fontRef>
         </p:style>
         <p:txBody>
-          <a:bodyPr rtlCol="0" anchor="ctr" wrap="square" lIns="228600" rIns="228600" tIns="228600"/>
+          <a:bodyPr wrap="square" lIns="228600" tIns="228600" rIns="228600" rtlCol="0" anchor="ctr"/>
           <a:lstStyle/>
           <a:p>
             <a:pPr algn="ctr">
@@ -6736,6 +7495,7 @@
           <a:lstStyle/>
           <a:p>
             <a:pPr algn="ctr"/>
+            <a:endParaRPr/>
           </a:p>
         </p:txBody>
       </p:sp>
@@ -6777,7 +7537,7 @@
           </a:fontRef>
         </p:style>
         <p:txBody>
-          <a:bodyPr rtlCol="0" anchor="ctr" wrap="square" lIns="228600" rIns="228600" tIns="228600"/>
+          <a:bodyPr wrap="square" lIns="228600" tIns="228600" rIns="228600" rtlCol="0" anchor="ctr"/>
           <a:lstStyle/>
           <a:p>
             <a:pPr algn="ctr">
@@ -6866,6 +7626,7 @@
           <a:lstStyle/>
           <a:p>
             <a:pPr algn="ctr"/>
+            <a:endParaRPr/>
           </a:p>
         </p:txBody>
       </p:sp>
@@ -6907,7 +7668,7 @@
           </a:fontRef>
         </p:style>
         <p:txBody>
-          <a:bodyPr rtlCol="0" anchor="ctr" wrap="square" lIns="228600" rIns="228600" tIns="228600"/>
+          <a:bodyPr wrap="square" lIns="228600" tIns="228600" rIns="228600" rtlCol="0" anchor="ctr"/>
           <a:lstStyle/>
           <a:p>
             <a:pPr algn="ctr">
@@ -6996,6 +7757,7 @@
           <a:lstStyle/>
           <a:p>
             <a:pPr algn="ctr"/>
+            <a:endParaRPr/>
           </a:p>
         </p:txBody>
       </p:sp>
@@ -7037,7 +7799,7 @@
           </a:fontRef>
         </p:style>
         <p:txBody>
-          <a:bodyPr rtlCol="0" anchor="ctr" wrap="square" lIns="228600" rIns="228600" tIns="228600"/>
+          <a:bodyPr wrap="square" lIns="228600" tIns="228600" rIns="228600" rtlCol="0" anchor="ctr"/>
           <a:lstStyle/>
           <a:p>
             <a:pPr algn="ctr">
@@ -7126,6 +7888,7 @@
           <a:lstStyle/>
           <a:p>
             <a:pPr algn="ctr"/>
+            <a:endParaRPr/>
           </a:p>
         </p:txBody>
       </p:sp>
@@ -7138,7 +7901,7 @@
 </file>
 
 <file path=ppt/slides/slide4.xml><?xml version="1.0" encoding="utf-8"?>
-<p:sld xmlns:a="http://schemas.openxmlformats.org/drawingml/2006/main" xmlns:p="http://schemas.openxmlformats.org/presentationml/2006/main" xmlns:r="http://schemas.openxmlformats.org/officeDocument/2006/relationships">
+<p:sld xmlns:a="http://schemas.openxmlformats.org/drawingml/2006/main" xmlns:r="http://schemas.openxmlformats.org/officeDocument/2006/relationships" xmlns:p="http://schemas.openxmlformats.org/presentationml/2006/main">
   <p:cSld>
     <p:spTree>
       <p:nvGrpSpPr>
@@ -7146,7 +7909,14 @@
         <p:cNvGrpSpPr/>
         <p:nvPr/>
       </p:nvGrpSpPr>
-      <p:grpSpPr/>
+      <p:grpSpPr>
+        <a:xfrm>
+          <a:off x="0" y="0"/>
+          <a:ext cx="0" cy="0"/>
+          <a:chOff x="0" y="0"/>
+          <a:chExt cx="0" cy="0"/>
+        </a:xfrm>
+      </p:grpSpPr>
       <p:sp>
         <p:nvSpPr>
           <p:cNvPr id="2" name="Rectangle 1"/>
@@ -7187,6 +7957,7 @@
           <a:lstStyle/>
           <a:p>
             <a:pPr algn="ctr"/>
+            <a:endParaRPr/>
           </a:p>
         </p:txBody>
       </p:sp>
@@ -7207,7 +7978,7 @@
           <a:noFill/>
         </p:spPr>
         <p:txBody>
-          <a:bodyPr wrap="square" lIns="0" rIns="0" tIns="0" bIns="0">
+          <a:bodyPr wrap="square" lIns="0" tIns="0" rIns="0" bIns="0">
             <a:spAutoFit/>
           </a:bodyPr>
           <a:lstStyle/>
@@ -7243,7 +8014,7 @@
           <a:noFill/>
         </p:spPr>
         <p:txBody>
-          <a:bodyPr wrap="square" lIns="0" rIns="0" tIns="0" bIns="0">
+          <a:bodyPr wrap="square" lIns="0" tIns="0" rIns="0" bIns="0">
             <a:spAutoFit/>
           </a:bodyPr>
           <a:lstStyle/>
@@ -7279,7 +8050,7 @@
           <a:noFill/>
         </p:spPr>
         <p:txBody>
-          <a:bodyPr wrap="square" lIns="0" rIns="0" tIns="0" bIns="0">
+          <a:bodyPr wrap="square" lIns="0" tIns="0" rIns="0" bIns="0">
             <a:spAutoFit/>
           </a:bodyPr>
           <a:lstStyle/>
@@ -7360,7 +8131,7 @@
           </a:fontRef>
         </p:style>
         <p:txBody>
-          <a:bodyPr rtlCol="0" anchor="ctr" wrap="square" lIns="274320" rIns="274320" tIns="320040"/>
+          <a:bodyPr wrap="square" lIns="274320" tIns="320040" rIns="274320" rtlCol="0" anchor="ctr"/>
           <a:lstStyle/>
           <a:p>
             <a:pPr algn="ctr">
@@ -7447,7 +8218,7 @@
           </a:fontRef>
         </p:style>
         <p:txBody>
-          <a:bodyPr rtlCol="0" anchor="ctr" wrap="square" lIns="274320" rIns="274320" tIns="320040"/>
+          <a:bodyPr wrap="square" lIns="274320" tIns="320040" rIns="274320" rtlCol="0" anchor="ctr"/>
           <a:lstStyle/>
           <a:p>
             <a:pPr algn="ctr">
@@ -7534,7 +8305,7 @@
           </a:fontRef>
         </p:style>
         <p:txBody>
-          <a:bodyPr rtlCol="0" anchor="ctr" wrap="square" lIns="274320" rIns="274320" tIns="320040"/>
+          <a:bodyPr wrap="square" lIns="274320" tIns="320040" rIns="274320" rtlCol="0" anchor="ctr"/>
           <a:lstStyle/>
           <a:p>
             <a:pPr algn="ctr">
@@ -7621,7 +8392,7 @@
           </a:fontRef>
         </p:style>
         <p:txBody>
-          <a:bodyPr rtlCol="0" anchor="ctr" wrap="square" lIns="365760" rIns="365760" tIns="182880"/>
+          <a:bodyPr wrap="square" lIns="365760" tIns="182880" rIns="365760" rtlCol="0" anchor="ctr"/>
           <a:lstStyle/>
           <a:p>
             <a:pPr algn="ctr">
@@ -7663,7 +8434,7 @@
 </file>
 
 <file path=ppt/slides/slide5.xml><?xml version="1.0" encoding="utf-8"?>
-<p:sld xmlns:a="http://schemas.openxmlformats.org/drawingml/2006/main" xmlns:p="http://schemas.openxmlformats.org/presentationml/2006/main" xmlns:r="http://schemas.openxmlformats.org/officeDocument/2006/relationships">
+<p:sld xmlns:a="http://schemas.openxmlformats.org/drawingml/2006/main" xmlns:r="http://schemas.openxmlformats.org/officeDocument/2006/relationships" xmlns:p="http://schemas.openxmlformats.org/presentationml/2006/main">
   <p:cSld>
     <p:spTree>
       <p:nvGrpSpPr>
@@ -7671,7 +8442,14 @@
         <p:cNvGrpSpPr/>
         <p:nvPr/>
       </p:nvGrpSpPr>
-      <p:grpSpPr/>
+      <p:grpSpPr>
+        <a:xfrm>
+          <a:off x="0" y="0"/>
+          <a:ext cx="0" cy="0"/>
+          <a:chOff x="0" y="0"/>
+          <a:chExt cx="0" cy="0"/>
+        </a:xfrm>
+      </p:grpSpPr>
       <p:sp>
         <p:nvSpPr>
           <p:cNvPr id="2" name="Rectangle 1"/>
@@ -7712,6 +8490,7 @@
           <a:lstStyle/>
           <a:p>
             <a:pPr algn="ctr"/>
+            <a:endParaRPr/>
           </a:p>
         </p:txBody>
       </p:sp>
@@ -7732,7 +8511,7 @@
           <a:noFill/>
         </p:spPr>
         <p:txBody>
-          <a:bodyPr wrap="square" lIns="0" rIns="0" tIns="0" bIns="0">
+          <a:bodyPr wrap="square" lIns="0" tIns="0" rIns="0" bIns="0">
             <a:spAutoFit/>
           </a:bodyPr>
           <a:lstStyle/>
@@ -7768,7 +8547,7 @@
           <a:noFill/>
         </p:spPr>
         <p:txBody>
-          <a:bodyPr wrap="square" lIns="0" rIns="0" tIns="0" bIns="0">
+          <a:bodyPr wrap="square" lIns="0" tIns="0" rIns="0" bIns="0">
             <a:spAutoFit/>
           </a:bodyPr>
           <a:lstStyle/>
@@ -7804,7 +8583,7 @@
           <a:noFill/>
         </p:spPr>
         <p:txBody>
-          <a:bodyPr wrap="square" lIns="0" rIns="0" tIns="0" bIns="0">
+          <a:bodyPr wrap="square" lIns="0" tIns="0" rIns="0" bIns="0">
             <a:spAutoFit/>
           </a:bodyPr>
           <a:lstStyle/>
@@ -7885,7 +8664,7 @@
           </a:fontRef>
         </p:style>
         <p:txBody>
-          <a:bodyPr rtlCol="0" anchor="ctr" wrap="square" lIns="365760" rIns="365760" tIns="365760"/>
+          <a:bodyPr wrap="square" lIns="365760" tIns="365760" rIns="365760" rtlCol="0" anchor="ctr"/>
           <a:lstStyle/>
           <a:p>
             <a:pPr algn="ctr">
@@ -8043,7 +8822,7 @@
           </a:fontRef>
         </p:style>
         <p:txBody>
-          <a:bodyPr rtlCol="0" anchor="ctr" wrap="square" lIns="320040" rIns="320040" tIns="274320"/>
+          <a:bodyPr wrap="square" lIns="320040" tIns="274320" rIns="320040" rtlCol="0" anchor="ctr"/>
           <a:lstStyle/>
           <a:p>
             <a:pPr algn="ctr">
@@ -8114,7 +8893,7 @@
           </a:fontRef>
         </p:style>
         <p:txBody>
-          <a:bodyPr rtlCol="0" anchor="ctr" wrap="square" lIns="320040" rIns="320040" tIns="274320"/>
+          <a:bodyPr wrap="square" lIns="320040" tIns="274320" rIns="320040" rtlCol="0" anchor="ctr"/>
           <a:lstStyle/>
           <a:p>
             <a:pPr algn="ctr">
@@ -8156,7 +8935,7 @@
 </file>
 
 <file path=ppt/slides/slide6.xml><?xml version="1.0" encoding="utf-8"?>
-<p:sld xmlns:a="http://schemas.openxmlformats.org/drawingml/2006/main" xmlns:p="http://schemas.openxmlformats.org/presentationml/2006/main" xmlns:r="http://schemas.openxmlformats.org/officeDocument/2006/relationships">
+<p:sld xmlns:a="http://schemas.openxmlformats.org/drawingml/2006/main" xmlns:r="http://schemas.openxmlformats.org/officeDocument/2006/relationships" xmlns:p="http://schemas.openxmlformats.org/presentationml/2006/main">
   <p:cSld>
     <p:spTree>
       <p:nvGrpSpPr>
@@ -8164,7 +8943,14 @@
         <p:cNvGrpSpPr/>
         <p:nvPr/>
       </p:nvGrpSpPr>
-      <p:grpSpPr/>
+      <p:grpSpPr>
+        <a:xfrm>
+          <a:off x="0" y="0"/>
+          <a:ext cx="0" cy="0"/>
+          <a:chOff x="0" y="0"/>
+          <a:chExt cx="0" cy="0"/>
+        </a:xfrm>
+      </p:grpSpPr>
       <p:sp>
         <p:nvSpPr>
           <p:cNvPr id="2" name="Rectangle 1"/>
@@ -8205,6 +8991,7 @@
           <a:lstStyle/>
           <a:p>
             <a:pPr algn="ctr"/>
+            <a:endParaRPr/>
           </a:p>
         </p:txBody>
       </p:sp>
@@ -8225,7 +9012,7 @@
           <a:noFill/>
         </p:spPr>
         <p:txBody>
-          <a:bodyPr wrap="square" lIns="0" rIns="0" tIns="0" bIns="0">
+          <a:bodyPr wrap="square" lIns="0" tIns="0" rIns="0" bIns="0">
             <a:spAutoFit/>
           </a:bodyPr>
           <a:lstStyle/>
@@ -8261,7 +9048,7 @@
           <a:noFill/>
         </p:spPr>
         <p:txBody>
-          <a:bodyPr wrap="square" lIns="0" rIns="0" tIns="0" bIns="0">
+          <a:bodyPr wrap="square" lIns="0" tIns="0" rIns="0" bIns="0">
             <a:spAutoFit/>
           </a:bodyPr>
           <a:lstStyle/>
@@ -8297,7 +9084,7 @@
           <a:noFill/>
         </p:spPr>
         <p:txBody>
-          <a:bodyPr wrap="square" lIns="0" rIns="0" tIns="0" bIns="0">
+          <a:bodyPr wrap="square" lIns="0" tIns="0" rIns="0" bIns="0">
             <a:spAutoFit/>
           </a:bodyPr>
           <a:lstStyle/>
@@ -8378,7 +9165,7 @@
           </a:fontRef>
         </p:style>
         <p:txBody>
-          <a:bodyPr rtlCol="0" anchor="ctr" wrap="square" lIns="274320" rIns="274320" tIns="320040"/>
+          <a:bodyPr wrap="square" lIns="274320" tIns="320040" rIns="274320" rtlCol="0" anchor="ctr"/>
           <a:lstStyle/>
           <a:p>
             <a:pPr algn="ctr">
@@ -8465,7 +9252,7 @@
           </a:fontRef>
         </p:style>
         <p:txBody>
-          <a:bodyPr rtlCol="0" anchor="ctr" wrap="square" lIns="274320" rIns="274320" tIns="320040"/>
+          <a:bodyPr wrap="square" lIns="274320" tIns="320040" rIns="274320" rtlCol="0" anchor="ctr"/>
           <a:lstStyle/>
           <a:p>
             <a:pPr algn="ctr">
@@ -8552,7 +9339,7 @@
           </a:fontRef>
         </p:style>
         <p:txBody>
-          <a:bodyPr rtlCol="0" anchor="ctr" wrap="square" lIns="274320" rIns="274320" tIns="320040"/>
+          <a:bodyPr wrap="square" lIns="274320" tIns="320040" rIns="274320" rtlCol="0" anchor="ctr"/>
           <a:lstStyle/>
           <a:p>
             <a:pPr algn="ctr">
@@ -8639,7 +9426,7 @@
           </a:fontRef>
         </p:style>
         <p:txBody>
-          <a:bodyPr rtlCol="0" anchor="ctr" wrap="square" lIns="365760" rIns="365760" tIns="182880"/>
+          <a:bodyPr wrap="square" lIns="365760" tIns="182880" rIns="365760" rtlCol="0" anchor="ctr"/>
           <a:lstStyle/>
           <a:p>
             <a:pPr algn="ctr">
@@ -8681,7 +9468,7 @@
 </file>
 
 <file path=ppt/slides/slide7.xml><?xml version="1.0" encoding="utf-8"?>
-<p:sld xmlns:a="http://schemas.openxmlformats.org/drawingml/2006/main" xmlns:p="http://schemas.openxmlformats.org/presentationml/2006/main" xmlns:r="http://schemas.openxmlformats.org/officeDocument/2006/relationships">
+<p:sld xmlns:a="http://schemas.openxmlformats.org/drawingml/2006/main" xmlns:r="http://schemas.openxmlformats.org/officeDocument/2006/relationships" xmlns:p="http://schemas.openxmlformats.org/presentationml/2006/main">
   <p:cSld>
     <p:spTree>
       <p:nvGrpSpPr>
@@ -8689,7 +9476,14 @@
         <p:cNvGrpSpPr/>
         <p:nvPr/>
       </p:nvGrpSpPr>
-      <p:grpSpPr/>
+      <p:grpSpPr>
+        <a:xfrm>
+          <a:off x="0" y="0"/>
+          <a:ext cx="0" cy="0"/>
+          <a:chOff x="0" y="0"/>
+          <a:chExt cx="0" cy="0"/>
+        </a:xfrm>
+      </p:grpSpPr>
       <p:sp>
         <p:nvSpPr>
           <p:cNvPr id="2" name="Rectangle 1"/>
@@ -8730,6 +9524,7 @@
           <a:lstStyle/>
           <a:p>
             <a:pPr algn="ctr"/>
+            <a:endParaRPr/>
           </a:p>
         </p:txBody>
       </p:sp>
@@ -8750,7 +9545,7 @@
           <a:noFill/>
         </p:spPr>
         <p:txBody>
-          <a:bodyPr wrap="square" lIns="0" rIns="0" tIns="0" bIns="0">
+          <a:bodyPr wrap="square" lIns="0" tIns="0" rIns="0" bIns="0">
             <a:spAutoFit/>
           </a:bodyPr>
           <a:lstStyle/>
@@ -8786,7 +9581,7 @@
           <a:noFill/>
         </p:spPr>
         <p:txBody>
-          <a:bodyPr wrap="square" lIns="0" rIns="0" tIns="0" bIns="0">
+          <a:bodyPr wrap="square" lIns="0" tIns="0" rIns="0" bIns="0">
             <a:spAutoFit/>
           </a:bodyPr>
           <a:lstStyle/>
@@ -8822,7 +9617,7 @@
           <a:noFill/>
         </p:spPr>
         <p:txBody>
-          <a:bodyPr wrap="square" lIns="0" rIns="0" tIns="0" bIns="0">
+          <a:bodyPr wrap="square" lIns="0" tIns="0" rIns="0" bIns="0">
             <a:spAutoFit/>
           </a:bodyPr>
           <a:lstStyle/>
@@ -8903,7 +9698,7 @@
           </a:fontRef>
         </p:style>
         <p:txBody>
-          <a:bodyPr rtlCol="0" anchor="ctr" wrap="square" lIns="365760" rIns="365760" tIns="365760"/>
+          <a:bodyPr wrap="square" lIns="365760" tIns="365760" rIns="365760" rtlCol="0" anchor="ctr"/>
           <a:lstStyle/>
           <a:p>
             <a:pPr algn="ctr">
@@ -9061,7 +9856,7 @@
           </a:fontRef>
         </p:style>
         <p:txBody>
-          <a:bodyPr rtlCol="0" anchor="ctr" wrap="square" lIns="320040" rIns="320040" tIns="274320"/>
+          <a:bodyPr wrap="square" lIns="320040" tIns="274320" rIns="320040" rtlCol="0" anchor="ctr"/>
           <a:lstStyle/>
           <a:p>
             <a:pPr algn="ctr">
@@ -9132,7 +9927,7 @@
           </a:fontRef>
         </p:style>
         <p:txBody>
-          <a:bodyPr rtlCol="0" anchor="ctr" wrap="square" lIns="320040" rIns="320040" tIns="274320"/>
+          <a:bodyPr wrap="square" lIns="320040" tIns="274320" rIns="320040" rtlCol="0" anchor="ctr"/>
           <a:lstStyle/>
           <a:p>
             <a:pPr algn="ctr">
@@ -9174,7 +9969,7 @@
 </file>
 
 <file path=ppt/slides/slide8.xml><?xml version="1.0" encoding="utf-8"?>
-<p:sld xmlns:a="http://schemas.openxmlformats.org/drawingml/2006/main" xmlns:p="http://schemas.openxmlformats.org/presentationml/2006/main" xmlns:r="http://schemas.openxmlformats.org/officeDocument/2006/relationships">
+<p:sld xmlns:a="http://schemas.openxmlformats.org/drawingml/2006/main" xmlns:r="http://schemas.openxmlformats.org/officeDocument/2006/relationships" xmlns:p="http://schemas.openxmlformats.org/presentationml/2006/main">
   <p:cSld>
     <p:spTree>
       <p:nvGrpSpPr>
@@ -9182,7 +9977,14 @@
         <p:cNvGrpSpPr/>
         <p:nvPr/>
       </p:nvGrpSpPr>
-      <p:grpSpPr/>
+      <p:grpSpPr>
+        <a:xfrm>
+          <a:off x="0" y="0"/>
+          <a:ext cx="0" cy="0"/>
+          <a:chOff x="0" y="0"/>
+          <a:chExt cx="0" cy="0"/>
+        </a:xfrm>
+      </p:grpSpPr>
       <p:sp>
         <p:nvSpPr>
           <p:cNvPr id="2" name="Rectangle 1"/>
@@ -9223,6 +10025,7 @@
           <a:lstStyle/>
           <a:p>
             <a:pPr algn="ctr"/>
+            <a:endParaRPr/>
           </a:p>
         </p:txBody>
       </p:sp>
@@ -9243,7 +10046,7 @@
           <a:noFill/>
         </p:spPr>
         <p:txBody>
-          <a:bodyPr wrap="square" lIns="0" rIns="0" tIns="0" bIns="0">
+          <a:bodyPr wrap="square" lIns="0" tIns="0" rIns="0" bIns="0">
             <a:spAutoFit/>
           </a:bodyPr>
           <a:lstStyle/>
@@ -9279,7 +10082,7 @@
           <a:noFill/>
         </p:spPr>
         <p:txBody>
-          <a:bodyPr wrap="square" lIns="0" rIns="0" tIns="0" bIns="0">
+          <a:bodyPr wrap="square" lIns="0" tIns="0" rIns="0" bIns="0">
             <a:spAutoFit/>
           </a:bodyPr>
           <a:lstStyle/>
@@ -9315,7 +10118,7 @@
           <a:noFill/>
         </p:spPr>
         <p:txBody>
-          <a:bodyPr wrap="square" lIns="0" rIns="0" tIns="0" bIns="0">
+          <a:bodyPr wrap="square" lIns="0" tIns="0" rIns="0" bIns="0">
             <a:spAutoFit/>
           </a:bodyPr>
           <a:lstStyle/>
@@ -9396,7 +10199,7 @@
           </a:fontRef>
         </p:style>
         <p:txBody>
-          <a:bodyPr rtlCol="0" anchor="ctr" wrap="square" lIns="228600" rIns="228600" tIns="274320"/>
+          <a:bodyPr wrap="square" lIns="228600" tIns="274320" rIns="228600" rtlCol="0" anchor="ctr"/>
           <a:lstStyle/>
           <a:p>
             <a:pPr algn="ctr">
@@ -9485,6 +10288,7 @@
           <a:lstStyle/>
           <a:p>
             <a:pPr algn="ctr"/>
+            <a:endParaRPr/>
           </a:p>
         </p:txBody>
       </p:sp>
@@ -9526,7 +10330,7 @@
           </a:fontRef>
         </p:style>
         <p:txBody>
-          <a:bodyPr rtlCol="0" anchor="ctr" wrap="square" lIns="228600" rIns="228600" tIns="274320"/>
+          <a:bodyPr wrap="square" lIns="228600" tIns="274320" rIns="228600" rtlCol="0" anchor="ctr"/>
           <a:lstStyle/>
           <a:p>
             <a:pPr algn="ctr">
@@ -9615,6 +10419,7 @@
           <a:lstStyle/>
           <a:p>
             <a:pPr algn="ctr"/>
+            <a:endParaRPr/>
           </a:p>
         </p:txBody>
       </p:sp>
@@ -9656,7 +10461,7 @@
           </a:fontRef>
         </p:style>
         <p:txBody>
-          <a:bodyPr rtlCol="0" anchor="ctr" wrap="square" lIns="228600" rIns="228600" tIns="274320"/>
+          <a:bodyPr wrap="square" lIns="228600" tIns="274320" rIns="228600" rtlCol="0" anchor="ctr"/>
           <a:lstStyle/>
           <a:p>
             <a:pPr algn="ctr">
@@ -9745,6 +10550,7 @@
           <a:lstStyle/>
           <a:p>
             <a:pPr algn="ctr"/>
+            <a:endParaRPr/>
           </a:p>
         </p:txBody>
       </p:sp>
@@ -9786,7 +10592,7 @@
           </a:fontRef>
         </p:style>
         <p:txBody>
-          <a:bodyPr rtlCol="0" anchor="ctr" wrap="square" lIns="228600" rIns="228600" tIns="274320"/>
+          <a:bodyPr wrap="square" lIns="228600" tIns="274320" rIns="228600" rtlCol="0" anchor="ctr"/>
           <a:lstStyle/>
           <a:p>
             <a:pPr algn="ctr">
@@ -9875,6 +10681,7 @@
           <a:lstStyle/>
           <a:p>
             <a:pPr algn="ctr"/>
+            <a:endParaRPr/>
           </a:p>
         </p:txBody>
       </p:sp>
@@ -9916,7 +10723,7 @@
           </a:fontRef>
         </p:style>
         <p:txBody>
-          <a:bodyPr rtlCol="0" anchor="ctr" wrap="square" lIns="365760" rIns="365760" tIns="164592"/>
+          <a:bodyPr wrap="square" lIns="365760" tIns="164592" rIns="365760" rtlCol="0" anchor="ctr"/>
           <a:lstStyle/>
           <a:p>
             <a:pPr algn="ctr">
@@ -9958,7 +10765,7 @@
 </file>
 
 <file path=ppt/slides/slide9.xml><?xml version="1.0" encoding="utf-8"?>
-<p:sld xmlns:a="http://schemas.openxmlformats.org/drawingml/2006/main" xmlns:p="http://schemas.openxmlformats.org/presentationml/2006/main" xmlns:r="http://schemas.openxmlformats.org/officeDocument/2006/relationships">
+<p:sld xmlns:a="http://schemas.openxmlformats.org/drawingml/2006/main" xmlns:r="http://schemas.openxmlformats.org/officeDocument/2006/relationships" xmlns:p="http://schemas.openxmlformats.org/presentationml/2006/main">
   <p:cSld>
     <p:spTree>
       <p:nvGrpSpPr>
@@ -9966,7 +10773,14 @@
         <p:cNvGrpSpPr/>
         <p:nvPr/>
       </p:nvGrpSpPr>
-      <p:grpSpPr/>
+      <p:grpSpPr>
+        <a:xfrm>
+          <a:off x="0" y="0"/>
+          <a:ext cx="0" cy="0"/>
+          <a:chOff x="0" y="0"/>
+          <a:chExt cx="0" cy="0"/>
+        </a:xfrm>
+      </p:grpSpPr>
       <p:sp>
         <p:nvSpPr>
           <p:cNvPr id="2" name="Rectangle 1"/>
@@ -10007,6 +10821,7 @@
           <a:lstStyle/>
           <a:p>
             <a:pPr algn="ctr"/>
+            <a:endParaRPr/>
           </a:p>
         </p:txBody>
       </p:sp>
@@ -10027,7 +10842,7 @@
           <a:noFill/>
         </p:spPr>
         <p:txBody>
-          <a:bodyPr wrap="square" lIns="0" rIns="0" tIns="0" bIns="0">
+          <a:bodyPr wrap="square" lIns="0" tIns="0" rIns="0" bIns="0">
             <a:spAutoFit/>
           </a:bodyPr>
           <a:lstStyle/>
@@ -10063,7 +10878,7 @@
           <a:noFill/>
         </p:spPr>
         <p:txBody>
-          <a:bodyPr wrap="square" lIns="0" rIns="0" tIns="0" bIns="0">
+          <a:bodyPr wrap="square" lIns="0" tIns="0" rIns="0" bIns="0">
             <a:spAutoFit/>
           </a:bodyPr>
           <a:lstStyle/>
@@ -10099,7 +10914,7 @@
           <a:noFill/>
         </p:spPr>
         <p:txBody>
-          <a:bodyPr wrap="square" lIns="0" rIns="0" tIns="0" bIns="0">
+          <a:bodyPr wrap="square" lIns="0" tIns="0" rIns="0" bIns="0">
             <a:spAutoFit/>
           </a:bodyPr>
           <a:lstStyle/>
@@ -10180,7 +10995,7 @@
           </a:fontRef>
         </p:style>
         <p:txBody>
-          <a:bodyPr rtlCol="0" anchor="ctr" wrap="square" lIns="320040" rIns="320040" tIns="320040"/>
+          <a:bodyPr wrap="square" lIns="320040" tIns="320040" rIns="320040" rtlCol="0" anchor="ctr"/>
           <a:lstStyle/>
           <a:p>
             <a:pPr algn="ctr">
@@ -10316,7 +11131,7 @@
           </a:fontRef>
         </p:style>
         <p:txBody>
-          <a:bodyPr rtlCol="0" anchor="ctr" wrap="square" lIns="320040" rIns="320040" tIns="320040"/>
+          <a:bodyPr wrap="square" lIns="320040" tIns="320040" rIns="320040" rtlCol="0" anchor="ctr"/>
           <a:lstStyle/>
           <a:p>
             <a:pPr algn="ctr">
@@ -10452,7 +11267,7 @@
           </a:fontRef>
         </p:style>
         <p:txBody>
-          <a:bodyPr rtlCol="0" anchor="ctr" wrap="square" lIns="320040" rIns="320040" tIns="320040"/>
+          <a:bodyPr wrap="square" lIns="320040" tIns="320040" rIns="320040" rtlCol="0" anchor="ctr"/>
           <a:lstStyle/>
           <a:p>
             <a:pPr algn="ctr">
